--- a/Docs/ADSL - Marcus.pptx
+++ b/Docs/ADSL - Marcus.pptx
@@ -5,10 +5,10 @@
     <p:sldMasterId id="2147483659" r:id="rId1"/>
   </p:sldMasterIdLst>
   <p:notesMasterIdLst>
-    <p:notesMasterId r:id="rId13"/>
+    <p:notesMasterId r:id="rId14"/>
   </p:notesMasterIdLst>
   <p:handoutMasterIdLst>
-    <p:handoutMasterId r:id="rId14"/>
+    <p:handoutMasterId r:id="rId15"/>
   </p:handoutMasterIdLst>
   <p:sldIdLst>
     <p:sldId id="256" r:id="rId2"/>
@@ -17,28 +17,33 @@
     <p:sldId id="278" r:id="rId5"/>
     <p:sldId id="279" r:id="rId6"/>
     <p:sldId id="280" r:id="rId7"/>
-    <p:sldId id="281" r:id="rId8"/>
-    <p:sldId id="284" r:id="rId9"/>
-    <p:sldId id="282" r:id="rId10"/>
-    <p:sldId id="283" r:id="rId11"/>
-    <p:sldId id="275" r:id="rId12"/>
+    <p:sldId id="285" r:id="rId8"/>
+    <p:sldId id="281" r:id="rId9"/>
+    <p:sldId id="284" r:id="rId10"/>
+    <p:sldId id="282" r:id="rId11"/>
+    <p:sldId id="283" r:id="rId12"/>
+    <p:sldId id="275" r:id="rId13"/>
   </p:sldIdLst>
   <p:sldSz cx="9144000" cy="5143500" type="screen16x9"/>
   <p:notesSz cx="6858000" cy="9144000"/>
   <p:embeddedFontLst>
     <p:embeddedFont>
-      <p:font typeface="Roboto" panose="02000000000000000000" pitchFamily="2" charset="0"/>
-      <p:regular r:id="rId15"/>
-      <p:bold r:id="rId16"/>
-      <p:italic r:id="rId17"/>
-      <p:boldItalic r:id="rId18"/>
+      <p:font typeface="Roboto" panose="020B0604020202020204" charset="0"/>
+      <p:regular r:id="rId16"/>
+      <p:bold r:id="rId17"/>
+      <p:italic r:id="rId18"/>
+      <p:boldItalic r:id="rId19"/>
     </p:embeddedFont>
     <p:embeddedFont>
-      <p:font typeface="Roboto Light" panose="02000000000000000000" pitchFamily="2" charset="0"/>
-      <p:regular r:id="rId19"/>
-      <p:bold r:id="rId20"/>
-      <p:italic r:id="rId21"/>
-      <p:boldItalic r:id="rId22"/>
+      <p:font typeface="Roboto Light" panose="020B0604020202020204" charset="0"/>
+      <p:regular r:id="rId20"/>
+      <p:bold r:id="rId21"/>
+      <p:italic r:id="rId22"/>
+      <p:boldItalic r:id="rId23"/>
+    </p:embeddedFont>
+    <p:embeddedFont>
+      <p:font typeface="Roboto Medium" panose="020B0604020202020204" charset="0"/>
+      <p:regular r:id="rId24"/>
     </p:embeddedFont>
   </p:embeddedFontLst>
   <p:defaultTextStyle>
@@ -295,7 +300,7 @@
 <file path=ppt/revisionInfo.xml><?xml version="1.0" encoding="utf-8"?>
 <p1510:revInfo xmlns:a="http://schemas.openxmlformats.org/drawingml/2006/main" xmlns:r="http://schemas.openxmlformats.org/officeDocument/2006/relationships" xmlns:p1510="http://schemas.microsoft.com/office/powerpoint/2015/10/main">
   <p1510:revLst>
-    <p1510:client id="{C6AF067A-1F3F-6276-FF2B-315D60384CD9}" v="8" dt="2025-11-25T02:01:23.469"/>
+    <p1510:client id="{40DFF169-7561-40EC-88FF-FDA9A208B68C}" v="114" dt="2025-12-02T13:29:54.101"/>
   </p1510:revLst>
 </p1510:revInfo>
 </file>
@@ -303,18 +308,18 @@
 <file path=ppt/changesInfos/changesInfo1.xml><?xml version="1.0" encoding="utf-8"?>
 <pc:chgInfo xmlns:a="http://schemas.openxmlformats.org/drawingml/2006/main" xmlns:r="http://schemas.openxmlformats.org/officeDocument/2006/relationships" xmlns:ac="http://schemas.microsoft.com/office/drawing/2013/main/command" xmlns:pc="http://schemas.microsoft.com/office/powerpoint/2013/main/command">
   <pc:docChgLst>
-    <pc:chgData name="Usuário Convidado" providerId="Windows Live" clId="Web-{908B7DA0-D33B-B610-1B47-BF6CD94D47C4}"/>
-    <pc:docChg chg="modSld">
-      <pc:chgData name="Usuário Convidado" userId="" providerId="Windows Live" clId="Web-{908B7DA0-D33B-B610-1B47-BF6CD94D47C4}" dt="2025-10-29T22:01:28.041" v="498" actId="20577"/>
+    <pc:chgData name="Usuário Convidado" providerId="Windows Live" clId="Web-{03A88128-BEC7-1BBB-E151-5DB28F219C1B}"/>
+    <pc:docChg chg="addSld delSld modSld">
+      <pc:chgData name="Usuário Convidado" userId="" providerId="Windows Live" clId="Web-{03A88128-BEC7-1BBB-E151-5DB28F219C1B}" dt="2025-10-30T11:18:38.253" v="19"/>
       <pc:docMkLst>
         <pc:docMk/>
       </pc:docMkLst>
     </pc:docChg>
   </pc:docChgLst>
   <pc:docChgLst>
-    <pc:chgData name="Usuário Convidado" providerId="Windows Live" clId="Web-{03A88128-BEC7-1BBB-E151-5DB28F219C1B}"/>
-    <pc:docChg chg="addSld delSld modSld">
-      <pc:chgData name="Usuário Convidado" userId="" providerId="Windows Live" clId="Web-{03A88128-BEC7-1BBB-E151-5DB28F219C1B}" dt="2025-10-30T11:18:38.253" v="19"/>
+    <pc:chgData name="Usuário Convidado" providerId="Windows Live" clId="Web-{908B7DA0-D33B-B610-1B47-BF6CD94D47C4}"/>
+    <pc:docChg chg="modSld">
+      <pc:chgData name="Usuário Convidado" userId="" providerId="Windows Live" clId="Web-{908B7DA0-D33B-B610-1B47-BF6CD94D47C4}" dt="2025-10-29T22:01:28.041" v="498" actId="20577"/>
       <pc:docMkLst>
         <pc:docMk/>
       </pc:docMkLst>
@@ -363,7 +368,7 @@
   <pc:docChgLst>
     <pc:chgData name="Marcus Vinícius de Faria Santos" userId="f3ba05d3ad3c9305" providerId="LiveId" clId="{744A556E-C55C-43AE-946F-9917EC8125F8}"/>
     <pc:docChg chg="undo custSel addSld delSld modSld sldOrd">
-      <pc:chgData name="Marcus Vinícius de Faria Santos" userId="f3ba05d3ad3c9305" providerId="LiveId" clId="{744A556E-C55C-43AE-946F-9917EC8125F8}" dt="2025-11-22T22:05:27.278" v="1119" actId="20577"/>
+      <pc:chgData name="Marcus Vinícius de Faria Santos" userId="f3ba05d3ad3c9305" providerId="LiveId" clId="{744A556E-C55C-43AE-946F-9917EC8125F8}" dt="2025-12-02T13:29:54.101" v="1232" actId="20577"/>
       <pc:docMkLst>
         <pc:docMk/>
       </pc:docMkLst>
@@ -671,6 +676,53 @@
           </ac:picMkLst>
         </pc:picChg>
       </pc:sldChg>
+      <pc:sldChg chg="modSp add mod">
+        <pc:chgData name="Marcus Vinícius de Faria Santos" userId="f3ba05d3ad3c9305" providerId="LiveId" clId="{744A556E-C55C-43AE-946F-9917EC8125F8}" dt="2025-12-02T13:29:54.101" v="1232" actId="20577"/>
+        <pc:sldMkLst>
+          <pc:docMk/>
+          <pc:sldMk cId="1938927544" sldId="285"/>
+        </pc:sldMkLst>
+        <pc:spChg chg="mod">
+          <ac:chgData name="Marcus Vinícius de Faria Santos" userId="f3ba05d3ad3c9305" providerId="LiveId" clId="{744A556E-C55C-43AE-946F-9917EC8125F8}" dt="2025-12-02T13:29:54.101" v="1232" actId="20577"/>
+          <ac:spMkLst>
+            <pc:docMk/>
+            <pc:sldMk cId="1938927544" sldId="285"/>
+            <ac:spMk id="2" creationId="{F434DCB2-2526-EFC3-7633-1584C35182FA}"/>
+          </ac:spMkLst>
+        </pc:spChg>
+        <pc:spChg chg="mod">
+          <ac:chgData name="Marcus Vinícius de Faria Santos" userId="f3ba05d3ad3c9305" providerId="LiveId" clId="{744A556E-C55C-43AE-946F-9917EC8125F8}" dt="2025-12-02T13:29:34.126" v="1205" actId="113"/>
+          <ac:spMkLst>
+            <pc:docMk/>
+            <pc:sldMk cId="1938927544" sldId="285"/>
+            <ac:spMk id="3" creationId="{FD2A70C8-C12B-79EE-20CB-FF546F7E45AA}"/>
+          </ac:spMkLst>
+        </pc:spChg>
+        <pc:spChg chg="mod">
+          <ac:chgData name="Marcus Vinícius de Faria Santos" userId="f3ba05d3ad3c9305" providerId="LiveId" clId="{744A556E-C55C-43AE-946F-9917EC8125F8}" dt="2025-12-02T13:29:38.386" v="1206" actId="113"/>
+          <ac:spMkLst>
+            <pc:docMk/>
+            <pc:sldMk cId="1938927544" sldId="285"/>
+            <ac:spMk id="8" creationId="{EF3762EA-A7D0-5069-7478-4837792B59ED}"/>
+          </ac:spMkLst>
+        </pc:spChg>
+        <pc:spChg chg="mod">
+          <ac:chgData name="Marcus Vinícius de Faria Santos" userId="f3ba05d3ad3c9305" providerId="LiveId" clId="{744A556E-C55C-43AE-946F-9917EC8125F8}" dt="2025-12-02T13:29:43.006" v="1208" actId="113"/>
+          <ac:spMkLst>
+            <pc:docMk/>
+            <pc:sldMk cId="1938927544" sldId="285"/>
+            <ac:spMk id="10" creationId="{E16DFFED-2902-CFBB-6690-03240586A866}"/>
+          </ac:spMkLst>
+        </pc:spChg>
+        <pc:spChg chg="mod">
+          <ac:chgData name="Marcus Vinícius de Faria Santos" userId="f3ba05d3ad3c9305" providerId="LiveId" clId="{744A556E-C55C-43AE-946F-9917EC8125F8}" dt="2025-12-02T13:29:45.487" v="1209" actId="113"/>
+          <ac:spMkLst>
+            <pc:docMk/>
+            <pc:sldMk cId="1938927544" sldId="285"/>
+            <ac:spMk id="11" creationId="{20249EDB-49CF-6928-98F7-067E1E6E3603}"/>
+          </ac:spMkLst>
+        </pc:spChg>
+      </pc:sldChg>
     </pc:docChg>
   </pc:docChgLst>
 </pc:chgInfo>
@@ -774,7 +826,7 @@
               <a:rPr lang="pt-BR" smtClean="0">
                 <a:latin typeface="Arial" panose="020B0604020202020204" pitchFamily="34" charset="0"/>
               </a:rPr>
-              <a:t>24/11/2025</a:t>
+              <a:t>02/12/2025</a:t>
             </a:fld>
             <a:endParaRPr lang="pt-BR">
               <a:latin typeface="Arial" panose="020B0604020202020204" pitchFamily="34" charset="0"/>
@@ -858,7 +910,7 @@
               <a:rPr lang="pt-BR" smtClean="0">
                 <a:latin typeface="Arial" panose="020B0604020202020204" pitchFamily="34" charset="0"/>
               </a:rPr>
-              <a:t>‹nº›</a:t>
+              <a:t>‹#›</a:t>
             </a:fld>
             <a:endParaRPr lang="pt-BR">
               <a:latin typeface="Arial" panose="020B0604020202020204" pitchFamily="34" charset="0"/>
@@ -2410,7 +2462,7 @@
             </a:pPr>
             <a:fld id="{00000000-1234-1234-1234-123412341234}" type="slidenum">
               <a:rPr lang="pt-BR"/>
-              <a:t>‹nº›</a:t>
+              <a:t>‹#›</a:t>
             </a:fld>
             <a:endParaRPr/>
           </a:p>
@@ -2801,7 +2853,7 @@
             </a:pPr>
             <a:fld id="{00000000-1234-1234-1234-123412341234}" type="slidenum">
               <a:rPr lang="pt-BR"/>
-              <a:t>‹nº›</a:t>
+              <a:t>‹#›</a:t>
             </a:fld>
             <a:endParaRPr/>
           </a:p>
@@ -2905,7 +2957,7 @@
             </a:pPr>
             <a:fld id="{00000000-1234-1234-1234-123412341234}" type="slidenum">
               <a:rPr lang="pt-BR"/>
-              <a:t>‹nº›</a:t>
+              <a:t>‹#›</a:t>
             </a:fld>
             <a:endParaRPr/>
           </a:p>
@@ -3138,7 +3190,7 @@
             </a:pPr>
             <a:fld id="{00000000-1234-1234-1234-123412341234}" type="slidenum">
               <a:rPr lang="pt-BR"/>
-              <a:t>‹nº›</a:t>
+              <a:t>‹#›</a:t>
             </a:fld>
             <a:endParaRPr/>
           </a:p>
@@ -3656,7 +3708,7 @@
             </a:pPr>
             <a:fld id="{00000000-1234-1234-1234-123412341234}" type="slidenum">
               <a:rPr lang="pt-BR"/>
-              <a:t>‹nº›</a:t>
+              <a:t>‹#›</a:t>
             </a:fld>
             <a:endParaRPr/>
           </a:p>
@@ -4147,7 +4199,7 @@
             </a:pPr>
             <a:fld id="{00000000-1234-1234-1234-123412341234}" type="slidenum">
               <a:rPr lang="pt-BR"/>
-              <a:t>‹nº›</a:t>
+              <a:t>‹#›</a:t>
             </a:fld>
             <a:endParaRPr/>
           </a:p>
@@ -4380,7 +4432,7 @@
             </a:pPr>
             <a:fld id="{00000000-1234-1234-1234-123412341234}" type="slidenum">
               <a:rPr lang="pt-BR"/>
-              <a:t>‹nº›</a:t>
+              <a:t>‹#›</a:t>
             </a:fld>
             <a:endParaRPr/>
           </a:p>
@@ -4742,7 +4794,7 @@
             </a:pPr>
             <a:fld id="{00000000-1234-1234-1234-123412341234}" type="slidenum">
               <a:rPr lang="pt-BR"/>
-              <a:t>‹nº›</a:t>
+              <a:t>‹#›</a:t>
             </a:fld>
             <a:endParaRPr/>
           </a:p>
@@ -4975,7 +5027,7 @@
             </a:pPr>
             <a:fld id="{00000000-1234-1234-1234-123412341234}" type="slidenum">
               <a:rPr lang="pt-BR"/>
-              <a:t>‹nº›</a:t>
+              <a:t>‹#›</a:t>
             </a:fld>
             <a:endParaRPr/>
           </a:p>
@@ -5535,7 +5587,7 @@
             </a:pPr>
             <a:fld id="{00000000-1234-1234-1234-123412341234}" type="slidenum">
               <a:rPr lang="pt-BR"/>
-              <a:t>‹nº›</a:t>
+              <a:t>‹#›</a:t>
             </a:fld>
             <a:endParaRPr/>
           </a:p>
@@ -5683,7 +5735,7 @@
             </a:pPr>
             <a:fld id="{00000000-1234-1234-1234-123412341234}" type="slidenum">
               <a:rPr lang="pt-BR"/>
-              <a:t>‹nº›</a:t>
+              <a:t>‹#›</a:t>
             </a:fld>
             <a:endParaRPr/>
           </a:p>
@@ -6429,7 +6481,7 @@
             </a:pPr>
             <a:fld id="{00000000-1234-1234-1234-123412341234}" type="slidenum">
               <a:rPr lang="pt-BR"/>
-              <a:t>‹nº›</a:t>
+              <a:t>‹#›</a:t>
             </a:fld>
             <a:endParaRPr/>
           </a:p>
@@ -7216,10 +7268,10 @@
           <a:p>
             <a:pPr lvl="0"/>
             <a:r>
-              <a:rPr lang="pt-BR" sz="4800" b="0" dirty="0"/>
+              <a:rPr lang="pt-BR" sz="4800" b="0"/>
               <a:t>Arduino DSL</a:t>
             </a:r>
-            <a:endParaRPr sz="3200" dirty="0"/>
+            <a:endParaRPr sz="3200"/>
           </a:p>
         </p:txBody>
       </p:sp>
@@ -7306,6 +7358,124 @@
 </file>
 
 <file path=ppt/slides/slide10.xml><?xml version="1.0" encoding="utf-8"?>
+<p:sld xmlns:a="http://schemas.openxmlformats.org/drawingml/2006/main" xmlns:r="http://schemas.openxmlformats.org/officeDocument/2006/relationships" xmlns:p="http://schemas.openxmlformats.org/presentationml/2006/main">
+  <p:cSld>
+    <p:spTree>
+      <p:nvGrpSpPr>
+        <p:cNvPr id="1" name=""/>
+        <p:cNvGrpSpPr/>
+        <p:nvPr/>
+      </p:nvGrpSpPr>
+      <p:grpSpPr>
+        <a:xfrm>
+          <a:off x="0" y="0"/>
+          <a:ext cx="0" cy="0"/>
+          <a:chOff x="0" y="0"/>
+          <a:chExt cx="0" cy="0"/>
+        </a:xfrm>
+      </p:grpSpPr>
+      <p:sp>
+        <p:nvSpPr>
+          <p:cNvPr id="2" name="Título 1">
+            <a:extLst>
+              <a:ext uri="{FF2B5EF4-FFF2-40B4-BE49-F238E27FC236}">
+                <a16:creationId xmlns:a16="http://schemas.microsoft.com/office/drawing/2014/main" id="{1E296379-3D96-CAA7-28BD-63FB7B89CDC0}"/>
+              </a:ext>
+            </a:extLst>
+          </p:cNvPr>
+          <p:cNvSpPr>
+            <a:spLocks noGrp="1"/>
+          </p:cNvSpPr>
+          <p:nvPr>
+            <p:ph type="title"/>
+          </p:nvPr>
+        </p:nvSpPr>
+        <p:spPr/>
+        <p:txBody>
+          <a:bodyPr/>
+          <a:lstStyle/>
+          <a:p>
+            <a:r>
+              <a:rPr lang="pt-BR"/>
+              <a:t>Exemplo 2: Original X Gerado</a:t>
+            </a:r>
+          </a:p>
+        </p:txBody>
+      </p:sp>
+      <p:pic>
+        <p:nvPicPr>
+          <p:cNvPr id="5" name="Imagem 4">
+            <a:extLst>
+              <a:ext uri="{FF2B5EF4-FFF2-40B4-BE49-F238E27FC236}">
+                <a16:creationId xmlns:a16="http://schemas.microsoft.com/office/drawing/2014/main" id="{9134CC02-8E3E-6B95-1285-0FCD19B25502}"/>
+              </a:ext>
+            </a:extLst>
+          </p:cNvPr>
+          <p:cNvPicPr>
+            <a:picLocks noChangeAspect="1"/>
+          </p:cNvPicPr>
+          <p:nvPr/>
+        </p:nvPicPr>
+        <p:blipFill>
+          <a:blip r:embed="rId2"/>
+          <a:stretch>
+            <a:fillRect/>
+          </a:stretch>
+        </p:blipFill>
+        <p:spPr>
+          <a:xfrm>
+            <a:off x="1244412" y="1040685"/>
+            <a:ext cx="3036926" cy="3717036"/>
+          </a:xfrm>
+          <a:prstGeom prst="rect">
+            <a:avLst/>
+          </a:prstGeom>
+        </p:spPr>
+      </p:pic>
+      <p:pic>
+        <p:nvPicPr>
+          <p:cNvPr id="7" name="Imagem 6">
+            <a:extLst>
+              <a:ext uri="{FF2B5EF4-FFF2-40B4-BE49-F238E27FC236}">
+                <a16:creationId xmlns:a16="http://schemas.microsoft.com/office/drawing/2014/main" id="{D7ECF204-4648-A4B8-D6B8-4555B3D044EB}"/>
+              </a:ext>
+            </a:extLst>
+          </p:cNvPr>
+          <p:cNvPicPr>
+            <a:picLocks noChangeAspect="1"/>
+          </p:cNvPicPr>
+          <p:nvPr/>
+        </p:nvPicPr>
+        <p:blipFill>
+          <a:blip r:embed="rId3"/>
+          <a:stretch>
+            <a:fillRect/>
+          </a:stretch>
+        </p:blipFill>
+        <p:spPr>
+          <a:xfrm>
+            <a:off x="4862664" y="1040685"/>
+            <a:ext cx="3252123" cy="3705606"/>
+          </a:xfrm>
+          <a:prstGeom prst="rect">
+            <a:avLst/>
+          </a:prstGeom>
+        </p:spPr>
+      </p:pic>
+    </p:spTree>
+    <p:extLst>
+      <p:ext uri="{BB962C8B-B14F-4D97-AF65-F5344CB8AC3E}">
+        <p14:creationId xmlns:p14="http://schemas.microsoft.com/office/powerpoint/2010/main" val="3625576380"/>
+      </p:ext>
+    </p:extLst>
+  </p:cSld>
+  <p:clrMapOvr>
+    <a:masterClrMapping/>
+  </p:clrMapOvr>
+</p:sld>
+</file>
+
+<file path=ppt/slides/slide11.xml><?xml version="1.0" encoding="utf-8"?>
 <p:sld xmlns:a="http://schemas.openxmlformats.org/drawingml/2006/main" xmlns:r="http://schemas.openxmlformats.org/officeDocument/2006/relationships" xmlns:p="http://schemas.openxmlformats.org/presentationml/2006/main">
   <p:cSld>
     <p:spTree>
@@ -7351,11 +7521,7 @@
           <a:p>
             <a:r>
               <a:rPr lang="pt-BR"/>
-              <a:t>Exemplo 3: </a:t>
-            </a:r>
-            <a:r>
-              <a:rPr lang="pt-BR" dirty="0"/>
-              <a:t>Original X Gerado</a:t>
+              <a:t>Exemplo 3: Original X Gerado</a:t>
             </a:r>
           </a:p>
         </p:txBody>
@@ -7433,7 +7599,7 @@
 </p:sld>
 </file>
 
-<file path=ppt/slides/slide11.xml><?xml version="1.0" encoding="utf-8"?>
+<file path=ppt/slides/slide12.xml><?xml version="1.0" encoding="utf-8"?>
 <p:sld xmlns:a="http://schemas.openxmlformats.org/drawingml/2006/main" xmlns:r="http://schemas.openxmlformats.org/officeDocument/2006/relationships" xmlns:p="http://schemas.openxmlformats.org/presentationml/2006/main">
   <p:cSld>
     <p:spTree>
@@ -7641,7 +7807,7 @@
               <a:buChar char="●"/>
             </a:pPr>
             <a:r>
-              <a:rPr lang="pt-BR" sz="1440" b="1" dirty="0">
+              <a:rPr lang="pt-BR" sz="1440" b="1">
                 <a:solidFill>
                   <a:srgbClr val="161616"/>
                 </a:solidFill>
@@ -7674,7 +7840,7 @@
               <a:defRPr/>
             </a:pPr>
             <a:r>
-              <a:rPr kumimoji="0" lang="pt-BR" sz="1340" b="0" i="0" u="none" strike="noStrike" kern="0" cap="none" spc="0" normalizeH="0" baseline="0" noProof="0" dirty="0">
+              <a:rPr kumimoji="0" lang="pt-BR" sz="1340" b="0" i="0" u="none" strike="noStrike" kern="0" cap="none" spc="0" normalizeH="0" baseline="0" noProof="0">
                 <a:ln>
                   <a:noFill/>
                 </a:ln>
@@ -7713,7 +7879,7 @@
               <a:defRPr/>
             </a:pPr>
             <a:r>
-              <a:rPr lang="pt-BR" sz="1340" dirty="0">
+              <a:rPr lang="pt-BR" sz="1340">
                 <a:solidFill>
                   <a:srgbClr val="161616"/>
                 </a:solidFill>
@@ -7725,7 +7891,7 @@
               <a:t>Open-</a:t>
             </a:r>
             <a:r>
-              <a:rPr lang="pt-BR" sz="1340" dirty="0" err="1">
+              <a:rPr lang="pt-BR" sz="1340" err="1">
                 <a:solidFill>
                   <a:srgbClr val="161616"/>
                 </a:solidFill>
@@ -7737,7 +7903,7 @@
               <a:t>Source</a:t>
             </a:r>
             <a:r>
-              <a:rPr lang="pt-BR" sz="1340" dirty="0">
+              <a:rPr lang="pt-BR" sz="1340">
                 <a:solidFill>
                   <a:srgbClr val="161616"/>
                 </a:solidFill>
@@ -7748,7 +7914,7 @@
               </a:rPr>
               <a:t> e de baixo custo.</a:t>
             </a:r>
-            <a:endParaRPr lang="pt-BR" sz="1040" b="1" dirty="0">
+            <a:endParaRPr lang="pt-BR" sz="1040" b="1">
               <a:solidFill>
                 <a:srgbClr val="161616"/>
               </a:solidFill>
@@ -7774,7 +7940,7 @@
               <a:buChar char="●"/>
             </a:pPr>
             <a:r>
-              <a:rPr lang="pt-BR" sz="1440" b="1" dirty="0">
+              <a:rPr lang="pt-BR" sz="1440" b="1">
                 <a:solidFill>
                   <a:srgbClr val="161616"/>
                 </a:solidFill>
@@ -7807,7 +7973,7 @@
               <a:defRPr/>
             </a:pPr>
             <a:r>
-              <a:rPr lang="pt-BR" sz="1340" dirty="0">
+              <a:rPr lang="pt-BR" sz="1340">
                 <a:solidFill>
                   <a:srgbClr val="161616"/>
                 </a:solidFill>
@@ -7840,7 +8006,7 @@
               <a:defRPr/>
             </a:pPr>
             <a:r>
-              <a:rPr lang="pt-BR" sz="1340" dirty="0">
+              <a:rPr lang="pt-BR" sz="1340">
                 <a:solidFill>
                   <a:srgbClr val="161616"/>
                 </a:solidFill>
@@ -7851,7 +8017,7 @@
               </a:rPr>
               <a:t>Compatibilidade com centenas de sensores e atuadores.</a:t>
             </a:r>
-            <a:endParaRPr lang="pt-BR" sz="1440" dirty="0">
+            <a:endParaRPr lang="pt-BR" sz="1440">
               <a:solidFill>
                 <a:srgbClr val="161616"/>
               </a:solidFill>
@@ -7877,7 +8043,7 @@
               <a:buChar char="●"/>
             </a:pPr>
             <a:r>
-              <a:rPr lang="pt-BR" sz="1440" b="1" dirty="0">
+              <a:rPr lang="pt-BR" sz="1440" b="1">
                 <a:solidFill>
                   <a:srgbClr val="161616"/>
                 </a:solidFill>
@@ -7888,7 +8054,7 @@
               </a:rPr>
               <a:t>Como se programa para Arduíno?</a:t>
             </a:r>
-            <a:endParaRPr sz="1440" b="1" dirty="0">
+            <a:endParaRPr sz="1440" b="1">
               <a:solidFill>
                 <a:srgbClr val="161616"/>
               </a:solidFill>
@@ -7917,7 +8083,7 @@
               <a:buChar char="○"/>
             </a:pPr>
             <a:r>
-              <a:rPr lang="pt-BR" sz="1340" dirty="0">
+              <a:rPr lang="pt-BR" sz="1340">
                 <a:solidFill>
                   <a:srgbClr val="161616"/>
                 </a:solidFill>
@@ -7948,7 +8114,7 @@
               <a:buChar char="○"/>
             </a:pPr>
             <a:r>
-              <a:rPr lang="pt-BR" sz="1340" dirty="0">
+              <a:rPr lang="pt-BR" sz="1340">
                 <a:solidFill>
                   <a:srgbClr val="161616"/>
                 </a:solidFill>
@@ -7959,7 +8125,7 @@
               </a:rPr>
               <a:t>Linguagem: C/C++</a:t>
             </a:r>
-            <a:endParaRPr sz="1340" dirty="0">
+            <a:endParaRPr sz="1340">
               <a:solidFill>
                 <a:srgbClr val="161616"/>
               </a:solidFill>
@@ -7979,7 +8145,7 @@
               </a:spcAft>
               <a:buNone/>
             </a:pPr>
-            <a:endParaRPr dirty="0"/>
+            <a:endParaRPr/>
           </a:p>
         </p:txBody>
       </p:sp>
@@ -8147,7 +8313,7 @@
               <a:buSzPts val="1440"/>
             </a:pPr>
             <a:r>
-              <a:rPr lang="pt-BR" sz="1440" dirty="0">
+              <a:rPr lang="pt-BR" sz="1440">
                 <a:solidFill>
                   <a:srgbClr val="161616"/>
                 </a:solidFill>
@@ -8161,7 +8327,7 @@
               <a:t>Apesar de muito utilizado para ensinar programação, é p</a:t>
             </a:r>
             <a:r>
-              <a:rPr lang="pt-BR" sz="1440" dirty="0">
+              <a:rPr lang="pt-BR" sz="1440">
                 <a:solidFill>
                   <a:srgbClr val="161616"/>
                 </a:solidFill>
@@ -8176,7 +8342,7 @@
               <a:t>ouco intuitivo para não fluentes em inglês</a:t>
             </a:r>
             <a:r>
-              <a:rPr kumimoji="0" lang="pt-BR" sz="1440" b="0" i="0" u="none" strike="noStrike" kern="0" cap="none" spc="0" normalizeH="0" baseline="0" noProof="0" dirty="0">
+              <a:rPr kumimoji="0" lang="pt-BR" sz="1440" b="0" i="0" u="none" strike="noStrike" kern="0" cap="none" spc="0" normalizeH="0" baseline="0" noProof="0">
                 <a:ln>
                   <a:noFill/>
                 </a:ln>
@@ -8309,7 +8475,7 @@
           <a:lstStyle/>
           <a:p>
             <a:pPr algn="ctr"/>
-            <a:endParaRPr lang="pt-BR" dirty="0"/>
+            <a:endParaRPr lang="pt-BR"/>
           </a:p>
         </p:txBody>
       </p:sp>
@@ -8406,7 +8572,7 @@
               <a:buNone/>
             </a:pPr>
             <a:r>
-              <a:rPr lang="pt-BR" dirty="0"/>
+              <a:rPr lang="pt-BR"/>
               <a:t>Abordagens</a:t>
             </a:r>
           </a:p>
@@ -8452,7 +8618,7 @@
               <a:buChar char="●"/>
             </a:pPr>
             <a:r>
-              <a:rPr lang="pt-BR" sz="1440" dirty="0">
+              <a:rPr lang="pt-BR" sz="1440">
                 <a:solidFill>
                   <a:srgbClr val="161616"/>
                 </a:solidFill>
@@ -8481,7 +8647,7 @@
               <a:defRPr/>
             </a:pPr>
             <a:r>
-              <a:rPr lang="pt-BR" sz="1340" dirty="0" err="1">
+              <a:rPr lang="pt-BR" sz="1340" err="1">
                 <a:solidFill>
                   <a:srgbClr val="161616"/>
                 </a:solidFill>
@@ -8496,7 +8662,7 @@
               <a:t>Visitors</a:t>
             </a:r>
             <a:r>
-              <a:rPr lang="pt-BR" sz="1340" dirty="0">
+              <a:rPr lang="pt-BR" sz="1340">
                 <a:solidFill>
                   <a:srgbClr val="161616"/>
                 </a:solidFill>
@@ -8525,7 +8691,7 @@
               <a:defRPr/>
             </a:pPr>
             <a:r>
-              <a:rPr lang="pt-BR" sz="1340" dirty="0" err="1">
+              <a:rPr lang="pt-BR" sz="1340" err="1">
                 <a:solidFill>
                   <a:srgbClr val="161616"/>
                 </a:solidFill>
@@ -8540,7 +8706,7 @@
               <a:t>Interpreter</a:t>
             </a:r>
             <a:r>
-              <a:rPr lang="pt-BR" sz="1340" dirty="0">
+              <a:rPr lang="pt-BR" sz="1340">
                 <a:solidFill>
                   <a:srgbClr val="161616"/>
                 </a:solidFill>
@@ -8586,28 +8752,28 @@
           <a:lstStyle/>
           <a:p>
             <a:r>
-              <a:rPr lang="pt-BR" sz="1200" b="1" dirty="0"/>
+              <a:rPr lang="pt-BR" sz="1200" b="1"/>
               <a:t>Código original:</a:t>
             </a:r>
           </a:p>
           <a:p>
-            <a:endParaRPr lang="pt-BR" sz="1200" dirty="0"/>
-          </a:p>
-          <a:p>
-            <a:r>
-              <a:rPr lang="pt-BR" sz="1200" dirty="0"/>
+            <a:endParaRPr lang="pt-BR" sz="1200"/>
+          </a:p>
+          <a:p>
+            <a:r>
+              <a:rPr lang="pt-BR" sz="1200"/>
               <a:t>acender pino 13</a:t>
             </a:r>
           </a:p>
           <a:p>
             <a:r>
-              <a:rPr lang="pt-BR" sz="1200" dirty="0"/>
+              <a:rPr lang="pt-BR" sz="1200"/>
               <a:t>esperar 2 segundos</a:t>
             </a:r>
           </a:p>
           <a:p>
             <a:r>
-              <a:rPr lang="pt-BR" sz="1200" dirty="0"/>
+              <a:rPr lang="pt-BR" sz="1200"/>
               <a:t>apagar pino 13</a:t>
             </a:r>
           </a:p>
@@ -8642,109 +8808,109 @@
           <a:lstStyle/>
           <a:p>
             <a:r>
-              <a:rPr lang="pt-BR" sz="1050" dirty="0"/>
+              <a:rPr lang="pt-BR" sz="1050"/>
               <a:t>// Código gerado pela DSL Arduino (português)</a:t>
             </a:r>
             <a:br>
-              <a:rPr lang="pt-BR" sz="1050" dirty="0"/>
+              <a:rPr lang="pt-BR" sz="1050"/>
             </a:br>
             <a:r>
-              <a:rPr lang="pt-BR" sz="1050" dirty="0"/>
+              <a:rPr lang="pt-BR" sz="1050"/>
               <a:t>#include &lt;</a:t>
             </a:r>
             <a:r>
-              <a:rPr lang="pt-BR" sz="1050" dirty="0" err="1"/>
+              <a:rPr lang="pt-BR" sz="1050" err="1"/>
               <a:t>Arduino.h</a:t>
             </a:r>
             <a:r>
-              <a:rPr lang="pt-BR" sz="1050" dirty="0"/>
+              <a:rPr lang="pt-BR" sz="1050"/>
               <a:t>&gt;</a:t>
             </a:r>
             <a:br>
-              <a:rPr lang="pt-BR" sz="1050" dirty="0"/>
+              <a:rPr lang="pt-BR" sz="1050"/>
             </a:br>
             <a:r>
-              <a:rPr lang="pt-BR" sz="1050" dirty="0" err="1"/>
+              <a:rPr lang="pt-BR" sz="1050" err="1"/>
               <a:t>void</a:t>
             </a:r>
             <a:r>
-              <a:rPr lang="pt-BR" sz="1050" dirty="0"/>
+              <a:rPr lang="pt-BR" sz="1050"/>
               <a:t> setup() {</a:t>
             </a:r>
             <a:br>
-              <a:rPr lang="pt-BR" sz="1050" dirty="0"/>
+              <a:rPr lang="pt-BR" sz="1050"/>
             </a:br>
             <a:r>
-              <a:rPr lang="pt-BR" sz="1050" dirty="0"/>
+              <a:rPr lang="pt-BR" sz="1050"/>
               <a:t>  </a:t>
             </a:r>
             <a:r>
-              <a:rPr lang="pt-BR" sz="1050" dirty="0" err="1"/>
+              <a:rPr lang="pt-BR" sz="1050" err="1"/>
               <a:t>pinMode</a:t>
             </a:r>
             <a:r>
-              <a:rPr lang="pt-BR" sz="1050" dirty="0"/>
+              <a:rPr lang="pt-BR" sz="1050"/>
               <a:t>(13, OUTPUT);</a:t>
             </a:r>
           </a:p>
           <a:p>
             <a:r>
-              <a:rPr lang="pt-BR" sz="1050" dirty="0"/>
+              <a:rPr lang="pt-BR" sz="1050"/>
               <a:t>}</a:t>
             </a:r>
             <a:r>
-              <a:rPr lang="pt-BR" sz="1050" dirty="0" err="1"/>
+              <a:rPr lang="pt-BR" sz="1050" err="1"/>
               <a:t>void</a:t>
             </a:r>
             <a:r>
-              <a:rPr lang="pt-BR" sz="1050" dirty="0"/>
+              <a:rPr lang="pt-BR" sz="1050"/>
               <a:t> loop() { </a:t>
             </a:r>
           </a:p>
           <a:p>
             <a:r>
-              <a:rPr lang="pt-BR" sz="1050" dirty="0"/>
+              <a:rPr lang="pt-BR" sz="1050"/>
               <a:t>  </a:t>
             </a:r>
             <a:r>
-              <a:rPr lang="pt-BR" sz="1050" dirty="0" err="1"/>
+              <a:rPr lang="pt-BR" sz="1050" err="1"/>
               <a:t>digitalWrite</a:t>
             </a:r>
             <a:r>
-              <a:rPr lang="pt-BR" sz="1050" dirty="0"/>
+              <a:rPr lang="pt-BR" sz="1050"/>
               <a:t>(13, HIGH);</a:t>
             </a:r>
           </a:p>
           <a:p>
             <a:r>
-              <a:rPr lang="pt-BR" sz="1050" dirty="0"/>
+              <a:rPr lang="pt-BR" sz="1050"/>
               <a:t>  delay(2000);</a:t>
             </a:r>
           </a:p>
           <a:p>
             <a:r>
-              <a:rPr lang="pt-BR" sz="1050" dirty="0"/>
+              <a:rPr lang="pt-BR" sz="1050"/>
               <a:t>  </a:t>
             </a:r>
             <a:r>
-              <a:rPr lang="pt-BR" sz="1050" dirty="0" err="1"/>
+              <a:rPr lang="pt-BR" sz="1050" err="1"/>
               <a:t>digitalWrite</a:t>
             </a:r>
             <a:r>
-              <a:rPr lang="pt-BR" sz="1050" dirty="0"/>
+              <a:rPr lang="pt-BR" sz="1050"/>
               <a:t>(13, LOW);  // repetir com pequeno atraso</a:t>
             </a:r>
           </a:p>
           <a:p>
             <a:r>
-              <a:rPr lang="pt-BR" sz="1050" dirty="0"/>
+              <a:rPr lang="pt-BR" sz="1050"/>
               <a:t>  delay(100);</a:t>
             </a:r>
             <a:br>
-              <a:rPr lang="pt-BR" sz="1050" dirty="0"/>
+              <a:rPr lang="pt-BR" sz="1050"/>
             </a:br>
             <a:r>
-              <a:rPr lang="pt-BR" sz="1050" dirty="0"/>
+              <a:rPr lang="pt-BR" sz="1050"/>
               <a:t>}</a:t>
             </a:r>
           </a:p>
@@ -8779,85 +8945,85 @@
           <a:lstStyle/>
           <a:p>
             <a:r>
-              <a:rPr lang="pt-BR" sz="1200" b="1" dirty="0"/>
+              <a:rPr lang="pt-BR" sz="1200" b="1"/>
               <a:t>Código original:</a:t>
             </a:r>
             <a:br>
-              <a:rPr lang="pt-BR" sz="1200" dirty="0"/>
+              <a:rPr lang="pt-BR" sz="1200"/>
             </a:br>
-            <a:endParaRPr lang="pt-BR" sz="1200" dirty="0"/>
-          </a:p>
-          <a:p>
-            <a:r>
-              <a:rPr lang="pt-BR" sz="1200" dirty="0" err="1"/>
+            <a:endParaRPr lang="pt-BR" sz="1200"/>
+          </a:p>
+          <a:p>
+            <a:r>
+              <a:rPr lang="pt-BR" sz="1200" err="1"/>
               <a:t>Config</a:t>
             </a:r>
             <a:r>
-              <a:rPr lang="pt-BR" sz="1200" dirty="0"/>
+              <a:rPr lang="pt-BR" sz="1200"/>
               <a:t> {</a:t>
             </a:r>
           </a:p>
           <a:p>
             <a:r>
-              <a:rPr lang="pt-BR" sz="1200" dirty="0"/>
+              <a:rPr lang="pt-BR" sz="1200"/>
               <a:t>    Saida 13;</a:t>
             </a:r>
           </a:p>
           <a:p>
             <a:r>
-              <a:rPr lang="pt-BR" sz="1200" dirty="0"/>
+              <a:rPr lang="pt-BR" sz="1200"/>
               <a:t>}</a:t>
             </a:r>
           </a:p>
           <a:p>
             <a:r>
-              <a:rPr lang="pt-BR" sz="1200" dirty="0"/>
+              <a:rPr lang="pt-BR" sz="1200"/>
               <a:t>Execute {</a:t>
             </a:r>
           </a:p>
           <a:p>
             <a:r>
-              <a:rPr lang="pt-BR" sz="1200" dirty="0"/>
+              <a:rPr lang="pt-BR" sz="1200"/>
               <a:t>    Escreva 13 1;</a:t>
             </a:r>
           </a:p>
           <a:p>
             <a:r>
-              <a:rPr lang="pt-BR" sz="1200" dirty="0"/>
+              <a:rPr lang="pt-BR" sz="1200"/>
               <a:t>    Espere 100 </a:t>
             </a:r>
             <a:r>
-              <a:rPr lang="pt-BR" sz="1200" dirty="0" err="1"/>
+              <a:rPr lang="pt-BR" sz="1200" err="1"/>
               <a:t>ms</a:t>
             </a:r>
             <a:r>
-              <a:rPr lang="pt-BR" sz="1200" dirty="0"/>
+              <a:rPr lang="pt-BR" sz="1200"/>
               <a:t>;</a:t>
             </a:r>
           </a:p>
           <a:p>
             <a:r>
-              <a:rPr lang="pt-BR" sz="1200" dirty="0"/>
+              <a:rPr lang="pt-BR" sz="1200"/>
               <a:t>    Escreva 13 0;</a:t>
             </a:r>
           </a:p>
           <a:p>
             <a:r>
-              <a:rPr lang="pt-BR" sz="1200" dirty="0"/>
+              <a:rPr lang="pt-BR" sz="1200"/>
               <a:t>    Espere 100 </a:t>
             </a:r>
             <a:r>
-              <a:rPr lang="pt-BR" sz="1200" dirty="0" err="1"/>
+              <a:rPr lang="pt-BR" sz="1200" err="1"/>
               <a:t>ms</a:t>
             </a:r>
             <a:r>
-              <a:rPr lang="pt-BR" sz="1200" dirty="0"/>
+              <a:rPr lang="pt-BR" sz="1200"/>
               <a:t>;</a:t>
             </a:r>
           </a:p>
           <a:p>
             <a:r>
-              <a:rPr lang="pt-BR" sz="1200" dirty="0"/>
+              <a:rPr lang="pt-BR" sz="1200"/>
               <a:t>}</a:t>
             </a:r>
           </a:p>
@@ -8892,99 +9058,99 @@
           <a:lstStyle/>
           <a:p>
             <a:r>
-              <a:rPr lang="pt-BR" sz="1100" dirty="0"/>
+              <a:rPr lang="pt-BR" sz="1100"/>
               <a:t>// Código gerado automaticamente</a:t>
             </a:r>
           </a:p>
           <a:p>
-            <a:endParaRPr lang="pt-BR" sz="1100" dirty="0"/>
-          </a:p>
-          <a:p>
-            <a:r>
-              <a:rPr lang="pt-BR" sz="1100" dirty="0" err="1"/>
+            <a:endParaRPr lang="pt-BR" sz="1100"/>
+          </a:p>
+          <a:p>
+            <a:r>
+              <a:rPr lang="pt-BR" sz="1100" err="1"/>
               <a:t>void</a:t>
             </a:r>
             <a:r>
-              <a:rPr lang="pt-BR" sz="1100" dirty="0"/>
+              <a:rPr lang="pt-BR" sz="1100"/>
               <a:t> setup() {</a:t>
             </a:r>
           </a:p>
           <a:p>
             <a:r>
-              <a:rPr lang="pt-BR" sz="1100" dirty="0"/>
+              <a:rPr lang="pt-BR" sz="1100"/>
               <a:t>  </a:t>
             </a:r>
             <a:r>
-              <a:rPr lang="pt-BR" sz="1100" dirty="0" err="1"/>
+              <a:rPr lang="pt-BR" sz="1100" err="1"/>
               <a:t>pinMode</a:t>
             </a:r>
             <a:r>
-              <a:rPr lang="pt-BR" sz="1100" dirty="0"/>
+              <a:rPr lang="pt-BR" sz="1100"/>
               <a:t>(13, OUTPUT);</a:t>
             </a:r>
           </a:p>
           <a:p>
             <a:r>
-              <a:rPr lang="pt-BR" sz="1100" dirty="0"/>
+              <a:rPr lang="pt-BR" sz="1100"/>
               <a:t>}</a:t>
             </a:r>
           </a:p>
           <a:p>
-            <a:endParaRPr lang="pt-BR" sz="1100" dirty="0"/>
-          </a:p>
-          <a:p>
-            <a:r>
-              <a:rPr lang="pt-BR" sz="1100" dirty="0" err="1"/>
+            <a:endParaRPr lang="pt-BR" sz="1100"/>
+          </a:p>
+          <a:p>
+            <a:r>
+              <a:rPr lang="pt-BR" sz="1100" err="1"/>
               <a:t>void</a:t>
             </a:r>
             <a:r>
-              <a:rPr lang="pt-BR" sz="1100" dirty="0"/>
+              <a:rPr lang="pt-BR" sz="1100"/>
               <a:t> loop() {</a:t>
             </a:r>
           </a:p>
           <a:p>
             <a:r>
-              <a:rPr lang="pt-BR" sz="1100" dirty="0"/>
+              <a:rPr lang="pt-BR" sz="1100"/>
               <a:t>  </a:t>
             </a:r>
             <a:r>
-              <a:rPr lang="pt-BR" sz="1100" dirty="0" err="1"/>
+              <a:rPr lang="pt-BR" sz="1100" err="1"/>
               <a:t>digitalWrite</a:t>
             </a:r>
             <a:r>
-              <a:rPr lang="pt-BR" sz="1100" dirty="0"/>
+              <a:rPr lang="pt-BR" sz="1100"/>
               <a:t>(13, 1);</a:t>
             </a:r>
           </a:p>
           <a:p>
             <a:r>
-              <a:rPr lang="pt-BR" sz="1100" dirty="0"/>
+              <a:rPr lang="pt-BR" sz="1100"/>
               <a:t>  delay(100);</a:t>
             </a:r>
           </a:p>
           <a:p>
             <a:r>
-              <a:rPr lang="pt-BR" sz="1100" dirty="0"/>
+              <a:rPr lang="pt-BR" sz="1100"/>
               <a:t>  </a:t>
             </a:r>
             <a:r>
-              <a:rPr lang="pt-BR" sz="1100" dirty="0" err="1"/>
+              <a:rPr lang="pt-BR" sz="1100" err="1"/>
               <a:t>digitalWrite</a:t>
             </a:r>
             <a:r>
-              <a:rPr lang="pt-BR" sz="1100" dirty="0"/>
+              <a:rPr lang="pt-BR" sz="1100"/>
               <a:t>(13, 0);</a:t>
             </a:r>
           </a:p>
           <a:p>
             <a:r>
-              <a:rPr lang="pt-BR" sz="1100" dirty="0"/>
+              <a:rPr lang="pt-BR" sz="1100"/>
               <a:t>  delay(100);</a:t>
             </a:r>
           </a:p>
           <a:p>
             <a:r>
-              <a:rPr lang="pt-BR" sz="1100" dirty="0"/>
+              <a:rPr lang="pt-BR" sz="1100"/>
               <a:t>}</a:t>
             </a:r>
           </a:p>
@@ -9019,7 +9185,7 @@
           <a:lstStyle/>
           <a:p>
             <a:r>
-              <a:rPr lang="pt-BR" sz="1400" dirty="0" err="1">
+              <a:rPr lang="pt-BR" sz="1400" err="1">
                 <a:solidFill>
                   <a:srgbClr val="161616"/>
                 </a:solidFill>
@@ -9033,7 +9199,7 @@
               </a:rPr>
               <a:t>Visitors</a:t>
             </a:r>
-            <a:endParaRPr lang="pt-BR" dirty="0"/>
+            <a:endParaRPr lang="pt-BR"/>
           </a:p>
         </p:txBody>
       </p:sp>
@@ -9066,7 +9232,7 @@
           <a:lstStyle/>
           <a:p>
             <a:r>
-              <a:rPr lang="pt-BR" sz="1400" dirty="0" err="1">
+              <a:rPr lang="pt-BR" sz="1400" err="1">
                 <a:solidFill>
                   <a:srgbClr val="161616"/>
                 </a:solidFill>
@@ -9080,7 +9246,7 @@
               </a:rPr>
               <a:t>Interpreter</a:t>
             </a:r>
-            <a:endParaRPr lang="pt-BR" dirty="0"/>
+            <a:endParaRPr lang="pt-BR"/>
           </a:p>
         </p:txBody>
       </p:sp>
@@ -9136,10 +9302,10 @@
           <a:lstStyle/>
           <a:p>
             <a:r>
-              <a:rPr lang="pt-BR" dirty="0" err="1"/>
+              <a:rPr lang="pt-BR" err="1"/>
               <a:t>Visitors</a:t>
             </a:r>
-            <a:endParaRPr lang="pt-BR" dirty="0"/>
+            <a:endParaRPr lang="pt-BR"/>
           </a:p>
         </p:txBody>
       </p:sp>
@@ -9175,7 +9341,7 @@
               <a:buNone/>
             </a:pPr>
             <a:r>
-              <a:rPr lang="pt-BR" dirty="0"/>
+              <a:rPr lang="pt-BR"/>
               <a:t>O Visitor é um padrão de projeto que permite a definição de novas operações sobre os elementos da AST sem a necessidade de modificar as classes dos nós.</a:t>
             </a:r>
           </a:p>
@@ -9183,54 +9349,54 @@
             <a:pPr marL="114300" indent="0">
               <a:buNone/>
             </a:pPr>
-            <a:endParaRPr lang="pt-BR" b="1" dirty="0"/>
+            <a:endParaRPr lang="pt-BR" b="1"/>
           </a:p>
           <a:p>
             <a:pPr marL="114300" indent="0">
               <a:buNone/>
             </a:pPr>
             <a:r>
-              <a:rPr lang="pt-BR" b="1" dirty="0" err="1"/>
+              <a:rPr lang="pt-BR" b="1" err="1"/>
               <a:t>ADSL.jjt</a:t>
             </a:r>
-            <a:endParaRPr lang="pt-BR" dirty="0"/>
-          </a:p>
-          <a:p>
-            <a:r>
-              <a:rPr lang="pt-BR" dirty="0"/>
+            <a:endParaRPr lang="pt-BR"/>
+          </a:p>
+          <a:p>
+            <a:r>
+              <a:rPr lang="pt-BR"/>
               <a:t>Define a gramática da (DSL).</a:t>
             </a:r>
           </a:p>
           <a:p>
             <a:r>
-              <a:rPr lang="pt-BR" dirty="0"/>
+              <a:rPr lang="pt-BR"/>
               <a:t>Orienta o </a:t>
             </a:r>
             <a:r>
-              <a:rPr lang="pt-BR" dirty="0" err="1"/>
+              <a:rPr lang="pt-BR" err="1"/>
               <a:t>JJTree</a:t>
             </a:r>
             <a:r>
-              <a:rPr lang="pt-BR" dirty="0"/>
+              <a:rPr lang="pt-BR"/>
               <a:t> na construção da Árvore de Sintaxe Abstrata (AST). </a:t>
             </a:r>
           </a:p>
           <a:p>
-            <a:endParaRPr lang="pt-BR" dirty="0"/>
+            <a:endParaRPr lang="pt-BR"/>
           </a:p>
           <a:p>
             <a:pPr marL="114300" indent="0">
               <a:buNone/>
             </a:pPr>
             <a:r>
-              <a:rPr lang="pt-BR" b="1" dirty="0"/>
+              <a:rPr lang="pt-BR" b="1"/>
               <a:t>ArduinoVisitor.java</a:t>
             </a:r>
-            <a:endParaRPr lang="pt-BR" dirty="0"/>
-          </a:p>
-          <a:p>
-            <a:r>
-              <a:rPr lang="pt-BR" dirty="0"/>
+            <a:endParaRPr lang="pt-BR"/>
+          </a:p>
+          <a:p>
+            <a:r>
+              <a:rPr lang="pt-BR"/>
               <a:t>Percorre a AST gerada e, para cada nó visitado, gera o código C/C++ equivalente. </a:t>
             </a:r>
           </a:p>
@@ -9318,11 +9484,11 @@
           <a:lstStyle/>
           <a:p>
             <a:r>
-              <a:rPr lang="pt-BR" dirty="0" err="1"/>
+              <a:rPr lang="pt-BR" err="1"/>
               <a:t>Visitors</a:t>
             </a:r>
             <a:r>
-              <a:rPr lang="pt-BR" dirty="0"/>
+              <a:rPr lang="pt-BR"/>
               <a:t>: Gramática </a:t>
             </a:r>
           </a:p>
@@ -9360,7 +9526,7 @@
               <a:buNone/>
             </a:pPr>
             <a:r>
-              <a:rPr lang="pt-BR" sz="900" dirty="0"/>
+              <a:rPr lang="pt-BR" sz="900"/>
               <a:t>// Palavras reservadas</a:t>
             </a:r>
           </a:p>
@@ -9369,7 +9535,7 @@
               <a:buNone/>
             </a:pPr>
             <a:r>
-              <a:rPr lang="pt-BR" sz="900" dirty="0"/>
+              <a:rPr lang="pt-BR" sz="900"/>
               <a:t>TOKEN: {</a:t>
             </a:r>
           </a:p>
@@ -9378,15 +9544,15 @@
               <a:buNone/>
             </a:pPr>
             <a:r>
-              <a:rPr lang="pt-BR" sz="900" dirty="0"/>
+              <a:rPr lang="pt-BR" sz="900"/>
               <a:t>  &lt;CONFIG: "</a:t>
             </a:r>
             <a:r>
-              <a:rPr lang="pt-BR" sz="900" dirty="0" err="1"/>
+              <a:rPr lang="pt-BR" sz="900" err="1"/>
               <a:t>Config</a:t>
             </a:r>
             <a:r>
-              <a:rPr lang="pt-BR" sz="900" dirty="0"/>
+              <a:rPr lang="pt-BR" sz="900"/>
               <a:t>"&gt;</a:t>
             </a:r>
           </a:p>
@@ -9395,7 +9561,7 @@
               <a:buNone/>
             </a:pPr>
             <a:r>
-              <a:rPr lang="pt-BR" sz="900" dirty="0"/>
+              <a:rPr lang="pt-BR" sz="900"/>
               <a:t>| &lt;EXECUTE: "Execute"&gt;</a:t>
             </a:r>
           </a:p>
@@ -9404,7 +9570,7 @@
               <a:buNone/>
             </a:pPr>
             <a:r>
-              <a:rPr lang="pt-BR" sz="900" dirty="0"/>
+              <a:rPr lang="pt-BR" sz="900"/>
               <a:t>| &lt;ENTRADA: "Entrada"&gt;</a:t>
             </a:r>
           </a:p>
@@ -9413,7 +9579,7 @@
               <a:buNone/>
             </a:pPr>
             <a:r>
-              <a:rPr lang="pt-BR" sz="900" dirty="0"/>
+              <a:rPr lang="pt-BR" sz="900"/>
               <a:t>| &lt;SAIDA: "Saida"&gt;</a:t>
             </a:r>
           </a:p>
@@ -9422,7 +9588,7 @@
               <a:buNone/>
             </a:pPr>
             <a:r>
-              <a:rPr lang="pt-BR" sz="900" dirty="0"/>
+              <a:rPr lang="pt-BR" sz="900"/>
               <a:t>| &lt;ESPERA: "Espere"&gt;</a:t>
             </a:r>
           </a:p>
@@ -9431,7 +9597,7 @@
               <a:buNone/>
             </a:pPr>
             <a:r>
-              <a:rPr lang="pt-BR" sz="900" dirty="0"/>
+              <a:rPr lang="pt-BR" sz="900"/>
               <a:t>| &lt;MONITOR: "Monitor"&gt;</a:t>
             </a:r>
           </a:p>
@@ -9440,7 +9606,7 @@
               <a:buNone/>
             </a:pPr>
             <a:r>
-              <a:rPr lang="pt-BR" sz="900" dirty="0"/>
+              <a:rPr lang="pt-BR" sz="900"/>
               <a:t>| &lt;REPITA: "repita"&gt; </a:t>
             </a:r>
           </a:p>
@@ -9449,15 +9615,15 @@
               <a:buNone/>
             </a:pPr>
             <a:r>
-              <a:rPr lang="pt-BR" sz="900" dirty="0"/>
+              <a:rPr lang="pt-BR" sz="900"/>
               <a:t>| &lt;FUNCAO: "</a:t>
             </a:r>
             <a:r>
-              <a:rPr lang="pt-BR" sz="900" dirty="0" err="1"/>
+              <a:rPr lang="pt-BR" sz="900" err="1"/>
               <a:t>funcao</a:t>
             </a:r>
             <a:r>
-              <a:rPr lang="pt-BR" sz="900" dirty="0"/>
+              <a:rPr lang="pt-BR" sz="900"/>
               <a:t>"&gt;</a:t>
             </a:r>
           </a:p>
@@ -9466,7 +9632,7 @@
               <a:buNone/>
             </a:pPr>
             <a:r>
-              <a:rPr lang="pt-BR" sz="900" dirty="0"/>
+              <a:rPr lang="pt-BR" sz="900"/>
               <a:t>| &lt;RETORNE: "retorne"&gt;</a:t>
             </a:r>
           </a:p>
@@ -9475,15 +9641,15 @@
               <a:buNone/>
             </a:pPr>
             <a:r>
-              <a:rPr lang="pt-BR" sz="900" dirty="0"/>
+              <a:rPr lang="pt-BR" sz="900"/>
               <a:t>| &lt;VOID: "</a:t>
             </a:r>
             <a:r>
-              <a:rPr lang="pt-BR" sz="900" dirty="0" err="1"/>
+              <a:rPr lang="pt-BR" sz="900" err="1"/>
               <a:t>void</a:t>
             </a:r>
             <a:r>
-              <a:rPr lang="pt-BR" sz="900" dirty="0"/>
+              <a:rPr lang="pt-BR" sz="900"/>
               <a:t>"&gt;</a:t>
             </a:r>
           </a:p>
@@ -9491,13 +9657,13 @@
             <a:pPr marL="114300" indent="0">
               <a:buNone/>
             </a:pPr>
-            <a:endParaRPr lang="pt-BR" sz="900" dirty="0"/>
+            <a:endParaRPr lang="pt-BR" sz="900"/>
           </a:p>
           <a:p>
             <a:pPr marL="114300" indent="0">
               <a:buNone/>
             </a:pPr>
-            <a:endParaRPr lang="pt-BR" sz="900" dirty="0"/>
+            <a:endParaRPr lang="pt-BR" sz="900"/>
           </a:p>
         </p:txBody>
       </p:sp>
@@ -9784,7 +9950,7 @@
               <a:buNone/>
             </a:pPr>
             <a:r>
-              <a:rPr lang="pt-BR" sz="1000" dirty="0"/>
+              <a:rPr lang="pt-BR" sz="1000"/>
               <a:t>// Comandos de leitura e escrita</a:t>
             </a:r>
           </a:p>
@@ -9793,7 +9959,7 @@
               <a:buNone/>
             </a:pPr>
             <a:r>
-              <a:rPr lang="pt-BR" sz="1000" dirty="0"/>
+              <a:rPr lang="pt-BR" sz="1000"/>
               <a:t>| &lt;LEIA: "Leia"&gt;</a:t>
             </a:r>
           </a:p>
@@ -9802,7 +9968,7 @@
               <a:buNone/>
             </a:pPr>
             <a:r>
-              <a:rPr lang="pt-BR" sz="1000" dirty="0"/>
+              <a:rPr lang="pt-BR" sz="1000"/>
               <a:t>| &lt;ESCREVA: "Escreva"&gt;</a:t>
             </a:r>
           </a:p>
@@ -9811,15 +9977,15 @@
               <a:buNone/>
             </a:pPr>
             <a:r>
-              <a:rPr lang="pt-BR" sz="1000" dirty="0"/>
+              <a:rPr lang="pt-BR" sz="1000"/>
               <a:t>| &lt;ESCREVA_PWM: "</a:t>
             </a:r>
             <a:r>
-              <a:rPr lang="pt-BR" sz="1000" dirty="0" err="1"/>
+              <a:rPr lang="pt-BR" sz="1000" err="1"/>
               <a:t>EscrevaPWM</a:t>
             </a:r>
             <a:r>
-              <a:rPr lang="pt-BR" sz="1000" dirty="0"/>
+              <a:rPr lang="pt-BR" sz="1000"/>
               <a:t>"&gt;</a:t>
             </a:r>
           </a:p>
@@ -9828,15 +9994,15 @@
               <a:buNone/>
             </a:pPr>
             <a:r>
-              <a:rPr lang="pt-BR" sz="1000" dirty="0"/>
+              <a:rPr lang="pt-BR" sz="1000"/>
               <a:t>| &lt;ESCREVA_MON: "</a:t>
             </a:r>
             <a:r>
-              <a:rPr lang="pt-BR" sz="1000" dirty="0" err="1"/>
+              <a:rPr lang="pt-BR" sz="1000" err="1"/>
               <a:t>EscrevaMon</a:t>
             </a:r>
             <a:r>
-              <a:rPr lang="pt-BR" sz="1000" dirty="0"/>
+              <a:rPr lang="pt-BR" sz="1000"/>
               <a:t>"&gt;</a:t>
             </a:r>
           </a:p>
@@ -9844,14 +10010,14 @@
             <a:pPr marL="114300" indent="0">
               <a:buNone/>
             </a:pPr>
-            <a:endParaRPr lang="pt-BR" sz="1000" dirty="0"/>
+            <a:endParaRPr lang="pt-BR" sz="1000"/>
           </a:p>
           <a:p>
             <a:pPr marL="114300" indent="0">
               <a:buNone/>
             </a:pPr>
             <a:r>
-              <a:rPr lang="pt-BR" sz="1000" dirty="0"/>
+              <a:rPr lang="pt-BR" sz="1000"/>
               <a:t>// Estruturas de controle</a:t>
             </a:r>
           </a:p>
@@ -9860,7 +10026,7 @@
               <a:buNone/>
             </a:pPr>
             <a:r>
-              <a:rPr lang="pt-BR" sz="1000" dirty="0"/>
+              <a:rPr lang="pt-BR" sz="1000"/>
               <a:t>| &lt;SE: "se"&gt;</a:t>
             </a:r>
           </a:p>
@@ -9869,15 +10035,15 @@
               <a:buNone/>
             </a:pPr>
             <a:r>
-              <a:rPr lang="pt-BR" sz="1000" dirty="0"/>
+              <a:rPr lang="pt-BR" sz="1000"/>
               <a:t>| &lt;SENAO: "</a:t>
             </a:r>
             <a:r>
-              <a:rPr lang="pt-BR" sz="1000" dirty="0" err="1"/>
+              <a:rPr lang="pt-BR" sz="1000" err="1"/>
               <a:t>senao</a:t>
             </a:r>
             <a:r>
-              <a:rPr lang="pt-BR" sz="1000" dirty="0"/>
+              <a:rPr lang="pt-BR" sz="1000"/>
               <a:t>"&gt;</a:t>
             </a:r>
           </a:p>
@@ -9885,14 +10051,14 @@
             <a:pPr marL="114300" indent="0">
               <a:buNone/>
             </a:pPr>
-            <a:endParaRPr lang="pt-BR" sz="1000" dirty="0"/>
+            <a:endParaRPr lang="pt-BR" sz="1000"/>
           </a:p>
           <a:p>
             <a:pPr marL="114300" indent="0">
               <a:buNone/>
             </a:pPr>
             <a:r>
-              <a:rPr lang="pt-BR" sz="1000" dirty="0"/>
+              <a:rPr lang="pt-BR" sz="1000"/>
               <a:t>// Unidades de tempo</a:t>
             </a:r>
           </a:p>
@@ -9901,15 +10067,15 @@
               <a:buNone/>
             </a:pPr>
             <a:r>
-              <a:rPr lang="pt-BR" sz="1000" dirty="0"/>
+              <a:rPr lang="pt-BR" sz="1000"/>
               <a:t>| &lt;NS: "</a:t>
             </a:r>
             <a:r>
-              <a:rPr lang="pt-BR" sz="1000" dirty="0" err="1"/>
+              <a:rPr lang="pt-BR" sz="1000" err="1"/>
               <a:t>ns</a:t>
             </a:r>
             <a:r>
-              <a:rPr lang="pt-BR" sz="1000" dirty="0"/>
+              <a:rPr lang="pt-BR" sz="1000"/>
               <a:t>"&gt;</a:t>
             </a:r>
           </a:p>
@@ -9918,15 +10084,15 @@
               <a:buNone/>
             </a:pPr>
             <a:r>
-              <a:rPr lang="pt-BR" sz="1000" dirty="0"/>
+              <a:rPr lang="pt-BR" sz="1000"/>
               <a:t>| &lt;MS: "</a:t>
             </a:r>
             <a:r>
-              <a:rPr lang="pt-BR" sz="1000" dirty="0" err="1"/>
+              <a:rPr lang="pt-BR" sz="1000" err="1"/>
               <a:t>ms</a:t>
             </a:r>
             <a:r>
-              <a:rPr lang="pt-BR" sz="1000" dirty="0"/>
+              <a:rPr lang="pt-BR" sz="1000"/>
               <a:t>"&gt;</a:t>
             </a:r>
           </a:p>
@@ -9935,7 +10101,7 @@
               <a:buNone/>
             </a:pPr>
             <a:r>
-              <a:rPr lang="pt-BR" sz="1000" dirty="0"/>
+              <a:rPr lang="pt-BR" sz="1000"/>
               <a:t>| &lt;S: "s"&gt;</a:t>
             </a:r>
           </a:p>
@@ -9944,7 +10110,7 @@
               <a:buNone/>
             </a:pPr>
             <a:r>
-              <a:rPr lang="pt-BR" sz="1000" dirty="0"/>
+              <a:rPr lang="pt-BR" sz="1000"/>
               <a:t>| &lt;MIN: "min"&gt;</a:t>
             </a:r>
           </a:p>
@@ -9953,7 +10119,7 @@
               <a:buNone/>
             </a:pPr>
             <a:r>
-              <a:rPr lang="pt-BR" sz="1000" dirty="0"/>
+              <a:rPr lang="pt-BR" sz="1000"/>
               <a:t>| &lt;H: "h"&gt;</a:t>
             </a:r>
           </a:p>
@@ -9962,14 +10128,14 @@
               <a:buFont typeface="Roboto"/>
               <a:buNone/>
             </a:pPr>
-            <a:endParaRPr lang="pt-BR" sz="1000" dirty="0"/>
+            <a:endParaRPr lang="pt-BR" sz="1000"/>
           </a:p>
           <a:p>
             <a:pPr marL="114300" indent="0">
               <a:buFont typeface="Roboto"/>
               <a:buNone/>
             </a:pPr>
-            <a:endParaRPr lang="pt-BR" sz="1000" dirty="0"/>
+            <a:endParaRPr lang="pt-BR" sz="1000"/>
           </a:p>
         </p:txBody>
       </p:sp>
@@ -10256,7 +10422,7 @@
               <a:buNone/>
             </a:pPr>
             <a:r>
-              <a:rPr lang="pt-BR" sz="900" dirty="0"/>
+              <a:rPr lang="pt-BR" sz="900"/>
               <a:t>// Frequências do Serial Monitor</a:t>
             </a:r>
           </a:p>
@@ -10265,7 +10431,7 @@
               <a:buNone/>
             </a:pPr>
             <a:r>
-              <a:rPr lang="pt-BR" sz="900" dirty="0"/>
+              <a:rPr lang="pt-BR" sz="900"/>
               <a:t>| &lt;FREQ_300: "300"&gt;</a:t>
             </a:r>
           </a:p>
@@ -10274,7 +10440,7 @@
               <a:buNone/>
             </a:pPr>
             <a:r>
-              <a:rPr lang="pt-BR" sz="900" dirty="0"/>
+              <a:rPr lang="pt-BR" sz="900"/>
               <a:t>| &lt;FREQ_600: "600"&gt;</a:t>
             </a:r>
           </a:p>
@@ -10283,7 +10449,7 @@
               <a:buNone/>
             </a:pPr>
             <a:r>
-              <a:rPr lang="pt-BR" sz="900" dirty="0"/>
+              <a:rPr lang="pt-BR" sz="900"/>
               <a:t>[...]</a:t>
             </a:r>
           </a:p>
@@ -10292,7 +10458,7 @@
               <a:buNone/>
             </a:pPr>
             <a:r>
-              <a:rPr lang="pt-BR" sz="900" dirty="0"/>
+              <a:rPr lang="pt-BR" sz="900"/>
               <a:t>| &lt;FREQ_115200: "115200"&gt;</a:t>
             </a:r>
           </a:p>
@@ -10300,14 +10466,14 @@
             <a:pPr marL="114300" indent="0">
               <a:buNone/>
             </a:pPr>
-            <a:endParaRPr lang="pt-BR" sz="900" dirty="0"/>
+            <a:endParaRPr lang="pt-BR" sz="900"/>
           </a:p>
           <a:p>
             <a:pPr marL="114300" indent="0">
               <a:buNone/>
             </a:pPr>
             <a:r>
-              <a:rPr lang="pt-BR" sz="900" dirty="0"/>
+              <a:rPr lang="pt-BR" sz="900"/>
               <a:t>// Tipos de variáveis</a:t>
             </a:r>
           </a:p>
@@ -10316,7 +10482,7 @@
               <a:buNone/>
             </a:pPr>
             <a:r>
-              <a:rPr lang="pt-BR" sz="900" dirty="0"/>
+              <a:rPr lang="pt-BR" sz="900"/>
               <a:t>| &lt;BYTE: "byte"&gt;</a:t>
             </a:r>
           </a:p>
@@ -10325,15 +10491,15 @@
               <a:buNone/>
             </a:pPr>
             <a:r>
-              <a:rPr lang="pt-BR" sz="900" dirty="0"/>
+              <a:rPr lang="pt-BR" sz="900"/>
               <a:t>| &lt;INT: "</a:t>
             </a:r>
             <a:r>
-              <a:rPr lang="pt-BR" sz="900" dirty="0" err="1"/>
+              <a:rPr lang="pt-BR" sz="900" err="1"/>
               <a:t>int</a:t>
             </a:r>
             <a:r>
-              <a:rPr lang="pt-BR" sz="900" dirty="0"/>
+              <a:rPr lang="pt-BR" sz="900"/>
               <a:t>"&gt;</a:t>
             </a:r>
           </a:p>
@@ -10342,23 +10508,23 @@
               <a:buNone/>
             </a:pPr>
             <a:r>
-              <a:rPr lang="pt-BR" sz="900" dirty="0"/>
+              <a:rPr lang="pt-BR" sz="900"/>
               <a:t>| &lt;UNSIGNED_INT: "</a:t>
             </a:r>
             <a:r>
-              <a:rPr lang="pt-BR" sz="900" dirty="0" err="1"/>
+              <a:rPr lang="pt-BR" sz="900" err="1"/>
               <a:t>unsigned</a:t>
             </a:r>
             <a:r>
-              <a:rPr lang="pt-BR" sz="900" dirty="0"/>
+              <a:rPr lang="pt-BR" sz="900"/>
               <a:t> </a:t>
             </a:r>
             <a:r>
-              <a:rPr lang="pt-BR" sz="900" dirty="0" err="1"/>
+              <a:rPr lang="pt-BR" sz="900" err="1"/>
               <a:t>int</a:t>
             </a:r>
             <a:r>
-              <a:rPr lang="pt-BR" sz="900" dirty="0"/>
+              <a:rPr lang="pt-BR" sz="900"/>
               <a:t>"&gt;</a:t>
             </a:r>
           </a:p>
@@ -10367,15 +10533,15 @@
               <a:buNone/>
             </a:pPr>
             <a:r>
-              <a:rPr lang="pt-BR" sz="900" dirty="0"/>
+              <a:rPr lang="pt-BR" sz="900"/>
               <a:t>| &lt;LONG: "</a:t>
             </a:r>
             <a:r>
-              <a:rPr lang="pt-BR" sz="900" dirty="0" err="1"/>
+              <a:rPr lang="pt-BR" sz="900" err="1"/>
               <a:t>long</a:t>
             </a:r>
             <a:r>
-              <a:rPr lang="pt-BR" sz="900" dirty="0"/>
+              <a:rPr lang="pt-BR" sz="900"/>
               <a:t>"&gt;</a:t>
             </a:r>
           </a:p>
@@ -10384,23 +10550,23 @@
               <a:buNone/>
             </a:pPr>
             <a:r>
-              <a:rPr lang="pt-BR" sz="900" dirty="0"/>
+              <a:rPr lang="pt-BR" sz="900"/>
               <a:t>| &lt;UNSIGNED_LONG: "</a:t>
             </a:r>
             <a:r>
-              <a:rPr lang="pt-BR" sz="900" dirty="0" err="1"/>
+              <a:rPr lang="pt-BR" sz="900" err="1"/>
               <a:t>unsigned</a:t>
             </a:r>
             <a:r>
-              <a:rPr lang="pt-BR" sz="900" dirty="0"/>
+              <a:rPr lang="pt-BR" sz="900"/>
               <a:t> </a:t>
             </a:r>
             <a:r>
-              <a:rPr lang="pt-BR" sz="900" dirty="0" err="1"/>
+              <a:rPr lang="pt-BR" sz="900" err="1"/>
               <a:t>long</a:t>
             </a:r>
             <a:r>
-              <a:rPr lang="pt-BR" sz="900" dirty="0"/>
+              <a:rPr lang="pt-BR" sz="900"/>
               <a:t>"&gt;</a:t>
             </a:r>
           </a:p>
@@ -10409,7 +10575,7 @@
               <a:buNone/>
             </a:pPr>
             <a:r>
-              <a:rPr lang="pt-BR" sz="900" dirty="0"/>
+              <a:rPr lang="pt-BR" sz="900"/>
               <a:t>| &lt;FLOAT: "real"&gt;</a:t>
             </a:r>
           </a:p>
@@ -10418,7 +10584,7 @@
               <a:buNone/>
             </a:pPr>
             <a:r>
-              <a:rPr lang="pt-BR" sz="900" dirty="0"/>
+              <a:rPr lang="pt-BR" sz="900"/>
               <a:t>| &lt;CHAR: "char"&gt;</a:t>
             </a:r>
           </a:p>
@@ -10427,7 +10593,7 @@
               <a:buNone/>
             </a:pPr>
             <a:r>
-              <a:rPr lang="pt-BR" sz="900" dirty="0"/>
+              <a:rPr lang="pt-BR" sz="900"/>
               <a:t>| &lt;STRING_TYPE: "String"&gt;</a:t>
             </a:r>
           </a:p>
@@ -10436,15 +10602,15 @@
               <a:buNone/>
             </a:pPr>
             <a:r>
-              <a:rPr lang="pt-BR" sz="900" dirty="0"/>
+              <a:rPr lang="pt-BR" sz="900"/>
               <a:t>| &lt;BOOLEAN: "</a:t>
             </a:r>
             <a:r>
-              <a:rPr lang="pt-BR" sz="900" dirty="0" err="1"/>
+              <a:rPr lang="pt-BR" sz="900" err="1"/>
               <a:t>Boolean</a:t>
             </a:r>
             <a:r>
-              <a:rPr lang="pt-BR" sz="900" dirty="0"/>
+              <a:rPr lang="pt-BR" sz="900"/>
               <a:t>"&gt;</a:t>
             </a:r>
           </a:p>
@@ -10733,7 +10899,7 @@
               <a:buNone/>
             </a:pPr>
             <a:r>
-              <a:rPr lang="pt-BR" sz="900" dirty="0"/>
+              <a:rPr lang="pt-BR" sz="900"/>
               <a:t>// Literais e identificadores</a:t>
             </a:r>
           </a:p>
@@ -10742,7 +10908,7 @@
               <a:buNone/>
             </a:pPr>
             <a:r>
-              <a:rPr lang="pt-BR" sz="900" dirty="0"/>
+              <a:rPr lang="pt-BR" sz="900"/>
               <a:t>TOKEN: {</a:t>
             </a:r>
           </a:p>
@@ -10751,7 +10917,7 @@
               <a:buNone/>
             </a:pPr>
             <a:r>
-              <a:rPr lang="pt-BR" sz="900" dirty="0"/>
+              <a:rPr lang="pt-BR" sz="900"/>
               <a:t>  &lt;NUM_FLT: (["0"-"9"])+ "." (["0"-"9"])+ &gt;</a:t>
             </a:r>
           </a:p>
@@ -10760,7 +10926,7 @@
               <a:buNone/>
             </a:pPr>
             <a:r>
-              <a:rPr lang="pt-BR" sz="900" dirty="0"/>
+              <a:rPr lang="pt-BR" sz="900"/>
               <a:t>| &lt;NUM_INT: (["0"-"9"])+ &gt;</a:t>
             </a:r>
           </a:p>
@@ -10769,7 +10935,7 @@
               <a:buNone/>
             </a:pPr>
             <a:r>
-              <a:rPr lang="pt-BR" sz="900" dirty="0"/>
+              <a:rPr lang="pt-BR" sz="900"/>
               <a:t>| &lt;PINO_ANALOGICO: "A" (["0"-"5"]) &gt;</a:t>
             </a:r>
           </a:p>
@@ -10778,7 +10944,7 @@
               <a:buNone/>
             </a:pPr>
             <a:r>
-              <a:rPr lang="pt-BR" sz="900" dirty="0"/>
+              <a:rPr lang="pt-BR" sz="900"/>
               <a:t>| &lt;STRING: "\"" (~["\""])* "\""&gt;</a:t>
             </a:r>
           </a:p>
@@ -10787,15 +10953,15 @@
               <a:buNone/>
             </a:pPr>
             <a:r>
-              <a:rPr lang="pt-BR" sz="900" dirty="0"/>
+              <a:rPr lang="pt-BR" sz="900"/>
               <a:t>| &lt;IDENTIFIER: ["a"-"</a:t>
             </a:r>
             <a:r>
-              <a:rPr lang="pt-BR" sz="900" dirty="0" err="1"/>
+              <a:rPr lang="pt-BR" sz="900" err="1"/>
               <a:t>z","A</a:t>
             </a:r>
             <a:r>
-              <a:rPr lang="pt-BR" sz="900" dirty="0"/>
+              <a:rPr lang="pt-BR" sz="900"/>
               <a:t>"-"Z","_"] (["a"-"z","A"-"Z","_","0"-"9"])* &gt;</a:t>
             </a:r>
           </a:p>
@@ -10804,7 +10970,7 @@
               <a:buNone/>
             </a:pPr>
             <a:r>
-              <a:rPr lang="pt-BR" sz="900" dirty="0"/>
+              <a:rPr lang="pt-BR" sz="900"/>
               <a:t>}</a:t>
             </a:r>
           </a:p>
@@ -10813,7 +10979,7 @@
               <a:buNone/>
             </a:pPr>
             <a:r>
-              <a:rPr lang="pt-BR" sz="900" dirty="0"/>
+              <a:rPr lang="pt-BR" sz="900"/>
               <a:t>TOKEN: { /* Operadores */</a:t>
             </a:r>
           </a:p>
@@ -10822,7 +10988,7 @@
               <a:buNone/>
             </a:pPr>
             <a:r>
-              <a:rPr lang="pt-BR" sz="900" dirty="0"/>
+              <a:rPr lang="pt-BR" sz="900"/>
               <a:t>TOKEN: { /* COMMENTS */</a:t>
             </a:r>
           </a:p>
@@ -10831,7 +10997,7 @@
               <a:buNone/>
             </a:pPr>
             <a:r>
-              <a:rPr lang="pt-BR" sz="900" dirty="0"/>
+              <a:rPr lang="pt-BR" sz="900"/>
               <a:t>SKIP : /* WHITE SPACE */</a:t>
             </a:r>
           </a:p>
@@ -10840,7 +11006,7 @@
               <a:buNone/>
             </a:pPr>
             <a:r>
-              <a:rPr lang="pt-BR" sz="900" dirty="0"/>
+              <a:rPr lang="pt-BR" sz="900"/>
               <a:t>TOKEN : /* SEPARATORS */</a:t>
             </a:r>
           </a:p>
@@ -10860,6 +11026,1645 @@
 </file>
 
 <file path=ppt/slides/slide7.xml><?xml version="1.0" encoding="utf-8"?>
+<p:sld xmlns:a="http://schemas.openxmlformats.org/drawingml/2006/main" xmlns:r="http://schemas.openxmlformats.org/officeDocument/2006/relationships" xmlns:p="http://schemas.openxmlformats.org/presentationml/2006/main">
+  <p:cSld>
+    <p:spTree>
+      <p:nvGrpSpPr>
+        <p:cNvPr id="1" name="">
+          <a:extLst>
+            <a:ext uri="{FF2B5EF4-FFF2-40B4-BE49-F238E27FC236}">
+              <a16:creationId xmlns:a16="http://schemas.microsoft.com/office/drawing/2014/main" id="{98E84BCC-F911-11BF-43DC-9CD04E190C96}"/>
+            </a:ext>
+          </a:extLst>
+        </p:cNvPr>
+        <p:cNvGrpSpPr/>
+        <p:nvPr/>
+      </p:nvGrpSpPr>
+      <p:grpSpPr>
+        <a:xfrm>
+          <a:off x="0" y="0"/>
+          <a:ext cx="0" cy="0"/>
+          <a:chOff x="0" y="0"/>
+          <a:chExt cx="0" cy="0"/>
+        </a:xfrm>
+      </p:grpSpPr>
+      <p:sp>
+        <p:nvSpPr>
+          <p:cNvPr id="2" name="Título 1">
+            <a:extLst>
+              <a:ext uri="{FF2B5EF4-FFF2-40B4-BE49-F238E27FC236}">
+                <a16:creationId xmlns:a16="http://schemas.microsoft.com/office/drawing/2014/main" id="{F434DCB2-2526-EFC3-7633-1584C35182FA}"/>
+              </a:ext>
+            </a:extLst>
+          </p:cNvPr>
+          <p:cNvSpPr>
+            <a:spLocks noGrp="1"/>
+          </p:cNvSpPr>
+          <p:nvPr>
+            <p:ph type="title"/>
+          </p:nvPr>
+        </p:nvSpPr>
+        <p:spPr/>
+        <p:txBody>
+          <a:bodyPr/>
+          <a:lstStyle/>
+          <a:p>
+            <a:r>
+              <a:rPr lang="pt-BR"/>
+              <a:t>BNF – Principais pontos</a:t>
+            </a:r>
+          </a:p>
+        </p:txBody>
+      </p:sp>
+      <p:sp>
+        <p:nvSpPr>
+          <p:cNvPr id="3" name="Espaço Reservado para Texto 2">
+            <a:extLst>
+              <a:ext uri="{FF2B5EF4-FFF2-40B4-BE49-F238E27FC236}">
+                <a16:creationId xmlns:a16="http://schemas.microsoft.com/office/drawing/2014/main" id="{FD2A70C8-C12B-79EE-20CB-FF546F7E45AA}"/>
+              </a:ext>
+            </a:extLst>
+          </p:cNvPr>
+          <p:cNvSpPr>
+            <a:spLocks noGrp="1"/>
+          </p:cNvSpPr>
+          <p:nvPr>
+            <p:ph type="body" idx="1"/>
+          </p:nvPr>
+        </p:nvSpPr>
+        <p:spPr>
+          <a:xfrm>
+            <a:off x="311700" y="1128221"/>
+            <a:ext cx="1756943" cy="3416400"/>
+          </a:xfrm>
+        </p:spPr>
+        <p:txBody>
+          <a:bodyPr>
+            <a:normAutofit/>
+          </a:bodyPr>
+          <a:lstStyle/>
+          <a:p>
+            <a:pPr marL="114300" indent="0">
+              <a:buNone/>
+            </a:pPr>
+            <a:r>
+              <a:rPr lang="pt-BR" sz="900" b="1"/>
+              <a:t>Start</a:t>
+            </a:r>
+            <a:r>
+              <a:rPr lang="pt-BR" sz="900"/>
+              <a:t>:=</a:t>
+            </a:r>
+          </a:p>
+          <a:p>
+            <a:pPr marL="114300" indent="0">
+              <a:buNone/>
+            </a:pPr>
+            <a:r>
+              <a:rPr lang="en-US" sz="900"/>
+              <a:t>(</a:t>
+            </a:r>
+          </a:p>
+          <a:p>
+            <a:pPr marL="114300" indent="0">
+              <a:buNone/>
+            </a:pPr>
+            <a:r>
+              <a:rPr lang="en-US" sz="900"/>
+              <a:t>    Config()</a:t>
+            </a:r>
+          </a:p>
+          <a:p>
+            <a:pPr marL="114300" indent="0">
+              <a:buNone/>
+            </a:pPr>
+            <a:r>
+              <a:rPr lang="en-US" sz="900"/>
+              <a:t>  | Execute() </a:t>
+            </a:r>
+          </a:p>
+          <a:p>
+            <a:pPr marL="114300" indent="0">
+              <a:buNone/>
+            </a:pPr>
+            <a:r>
+              <a:rPr lang="en-US" sz="900"/>
+              <a:t>  | </a:t>
+            </a:r>
+            <a:r>
+              <a:rPr lang="en-US" sz="900" err="1"/>
+              <a:t>Funcao</a:t>
+            </a:r>
+            <a:r>
+              <a:rPr lang="en-US" sz="900"/>
+              <a:t>()</a:t>
+            </a:r>
+          </a:p>
+          <a:p>
+            <a:pPr marL="114300" indent="0">
+              <a:buNone/>
+            </a:pPr>
+            <a:r>
+              <a:rPr lang="en-US" sz="900"/>
+              <a:t>  | </a:t>
+            </a:r>
+            <a:r>
+              <a:rPr lang="en-US" sz="900" err="1"/>
+              <a:t>SingleLineComment</a:t>
+            </a:r>
+            <a:r>
+              <a:rPr lang="en-US" sz="900"/>
+              <a:t>()</a:t>
+            </a:r>
+          </a:p>
+          <a:p>
+            <a:pPr marL="114300" indent="0">
+              <a:buNone/>
+            </a:pPr>
+            <a:r>
+              <a:rPr lang="en-US" sz="900"/>
+              <a:t>  | </a:t>
+            </a:r>
+            <a:r>
+              <a:rPr lang="en-US" sz="900" err="1"/>
+              <a:t>MultiLineComment</a:t>
+            </a:r>
+            <a:r>
+              <a:rPr lang="en-US" sz="900"/>
+              <a:t>()</a:t>
+            </a:r>
+          </a:p>
+          <a:p>
+            <a:pPr marL="114300" indent="0">
+              <a:buNone/>
+            </a:pPr>
+            <a:r>
+              <a:rPr lang="en-US" sz="900"/>
+              <a:t>  | </a:t>
+            </a:r>
+            <a:r>
+              <a:rPr lang="en-US" sz="900" err="1"/>
+              <a:t>FormalComment</a:t>
+            </a:r>
+            <a:r>
+              <a:rPr lang="en-US" sz="900"/>
+              <a:t>()</a:t>
+            </a:r>
+          </a:p>
+          <a:p>
+            <a:pPr marL="114300" indent="0">
+              <a:buNone/>
+            </a:pPr>
+            <a:r>
+              <a:rPr lang="en-US" sz="900"/>
+              <a:t>  | </a:t>
+            </a:r>
+            <a:r>
+              <a:rPr lang="en-US" sz="900" err="1"/>
+              <a:t>DecVar</a:t>
+            </a:r>
+            <a:r>
+              <a:rPr lang="en-US" sz="900"/>
+              <a:t>()</a:t>
+            </a:r>
+          </a:p>
+          <a:p>
+            <a:pPr marL="114300" indent="0">
+              <a:buNone/>
+            </a:pPr>
+            <a:r>
+              <a:rPr lang="en-US" sz="900"/>
+              <a:t>  )*</a:t>
+            </a:r>
+          </a:p>
+          <a:p>
+            <a:pPr marL="114300" indent="0">
+              <a:buNone/>
+            </a:pPr>
+            <a:r>
+              <a:rPr lang="en-US" sz="900"/>
+              <a:t>  &lt;EOF&gt;</a:t>
+            </a:r>
+            <a:endParaRPr lang="pt-BR" sz="900"/>
+          </a:p>
+        </p:txBody>
+      </p:sp>
+      <p:sp>
+        <p:nvSpPr>
+          <p:cNvPr id="8" name="Espaço Reservado para Texto 2">
+            <a:extLst>
+              <a:ext uri="{FF2B5EF4-FFF2-40B4-BE49-F238E27FC236}">
+                <a16:creationId xmlns:a16="http://schemas.microsoft.com/office/drawing/2014/main" id="{EF3762EA-A7D0-5069-7478-4837792B59ED}"/>
+              </a:ext>
+            </a:extLst>
+          </p:cNvPr>
+          <p:cNvSpPr txBox="1">
+            <a:spLocks/>
+          </p:cNvSpPr>
+          <p:nvPr/>
+        </p:nvSpPr>
+        <p:spPr>
+          <a:xfrm>
+            <a:off x="2068643" y="1128221"/>
+            <a:ext cx="2101718" cy="3416400"/>
+          </a:xfrm>
+          <a:prstGeom prst="rect">
+            <a:avLst/>
+          </a:prstGeom>
+          <a:noFill/>
+          <a:ln>
+            <a:noFill/>
+          </a:ln>
+        </p:spPr>
+        <p:txBody>
+          <a:bodyPr spcFirstLastPara="1" wrap="square" lIns="91425" tIns="91425" rIns="91425" bIns="91425" anchor="t" anchorCtr="0">
+            <a:normAutofit/>
+          </a:bodyPr>
+          <a:lstStyle>
+            <a:defPPr marR="0" lvl="0" algn="l" rtl="0">
+              <a:lnSpc>
+                <a:spcPct val="100000"/>
+              </a:lnSpc>
+              <a:spcBef>
+                <a:spcPts val="0"/>
+              </a:spcBef>
+              <a:spcAft>
+                <a:spcPts val="0"/>
+              </a:spcAft>
+            </a:defPPr>
+            <a:lvl1pPr marL="457200" marR="0" lvl="0" indent="-342900" algn="l" rtl="0">
+              <a:lnSpc>
+                <a:spcPct val="150000"/>
+              </a:lnSpc>
+              <a:spcBef>
+                <a:spcPts val="0"/>
+              </a:spcBef>
+              <a:spcAft>
+                <a:spcPts val="0"/>
+              </a:spcAft>
+              <a:buClr>
+                <a:srgbClr val="434343"/>
+              </a:buClr>
+              <a:buSzPts val="1800"/>
+              <a:buFont typeface="Roboto"/>
+              <a:buChar char="●"/>
+              <a:defRPr sz="1800" b="0" i="0" u="none" strike="noStrike" cap="none">
+                <a:solidFill>
+                  <a:srgbClr val="434343"/>
+                </a:solidFill>
+                <a:latin typeface="Roboto"/>
+                <a:ea typeface="Roboto"/>
+                <a:cs typeface="Roboto"/>
+                <a:sym typeface="Roboto"/>
+              </a:defRPr>
+            </a:lvl1pPr>
+            <a:lvl2pPr marL="914400" marR="0" lvl="1" indent="-317500" algn="l" rtl="0">
+              <a:lnSpc>
+                <a:spcPct val="150000"/>
+              </a:lnSpc>
+              <a:spcBef>
+                <a:spcPts val="1600"/>
+              </a:spcBef>
+              <a:spcAft>
+                <a:spcPts val="0"/>
+              </a:spcAft>
+              <a:buClr>
+                <a:srgbClr val="434343"/>
+              </a:buClr>
+              <a:buSzPts val="1400"/>
+              <a:buFont typeface="Roboto"/>
+              <a:buChar char="○"/>
+              <a:defRPr sz="1400" b="0" i="0" u="none" strike="noStrike" cap="none">
+                <a:solidFill>
+                  <a:srgbClr val="434343"/>
+                </a:solidFill>
+                <a:latin typeface="Roboto"/>
+                <a:ea typeface="Roboto"/>
+                <a:cs typeface="Roboto"/>
+                <a:sym typeface="Roboto"/>
+              </a:defRPr>
+            </a:lvl2pPr>
+            <a:lvl3pPr marL="1371600" marR="0" lvl="2" indent="-317500" algn="l" rtl="0">
+              <a:lnSpc>
+                <a:spcPct val="150000"/>
+              </a:lnSpc>
+              <a:spcBef>
+                <a:spcPts val="1600"/>
+              </a:spcBef>
+              <a:spcAft>
+                <a:spcPts val="0"/>
+              </a:spcAft>
+              <a:buClr>
+                <a:srgbClr val="434343"/>
+              </a:buClr>
+              <a:buSzPts val="1400"/>
+              <a:buFont typeface="Roboto"/>
+              <a:buChar char="■"/>
+              <a:defRPr sz="1400" b="0" i="0" u="none" strike="noStrike" cap="none">
+                <a:solidFill>
+                  <a:srgbClr val="434343"/>
+                </a:solidFill>
+                <a:latin typeface="Roboto"/>
+                <a:ea typeface="Roboto"/>
+                <a:cs typeface="Roboto"/>
+                <a:sym typeface="Roboto"/>
+              </a:defRPr>
+            </a:lvl3pPr>
+            <a:lvl4pPr marL="1828800" marR="0" lvl="3" indent="-317500" algn="l" rtl="0">
+              <a:lnSpc>
+                <a:spcPct val="150000"/>
+              </a:lnSpc>
+              <a:spcBef>
+                <a:spcPts val="1600"/>
+              </a:spcBef>
+              <a:spcAft>
+                <a:spcPts val="0"/>
+              </a:spcAft>
+              <a:buClr>
+                <a:srgbClr val="434343"/>
+              </a:buClr>
+              <a:buSzPts val="1400"/>
+              <a:buFont typeface="Roboto"/>
+              <a:buChar char="●"/>
+              <a:defRPr sz="1400" b="0" i="0" u="none" strike="noStrike" cap="none">
+                <a:solidFill>
+                  <a:srgbClr val="434343"/>
+                </a:solidFill>
+                <a:latin typeface="Roboto"/>
+                <a:ea typeface="Roboto"/>
+                <a:cs typeface="Roboto"/>
+                <a:sym typeface="Roboto"/>
+              </a:defRPr>
+            </a:lvl4pPr>
+            <a:lvl5pPr marL="2286000" marR="0" lvl="4" indent="-317500" algn="l" rtl="0">
+              <a:lnSpc>
+                <a:spcPct val="150000"/>
+              </a:lnSpc>
+              <a:spcBef>
+                <a:spcPts val="1600"/>
+              </a:spcBef>
+              <a:spcAft>
+                <a:spcPts val="0"/>
+              </a:spcAft>
+              <a:buClr>
+                <a:srgbClr val="434343"/>
+              </a:buClr>
+              <a:buSzPts val="1400"/>
+              <a:buFont typeface="Roboto"/>
+              <a:buChar char="○"/>
+              <a:defRPr sz="1400" b="0" i="0" u="none" strike="noStrike" cap="none">
+                <a:solidFill>
+                  <a:srgbClr val="434343"/>
+                </a:solidFill>
+                <a:latin typeface="Roboto"/>
+                <a:ea typeface="Roboto"/>
+                <a:cs typeface="Roboto"/>
+                <a:sym typeface="Roboto"/>
+              </a:defRPr>
+            </a:lvl5pPr>
+            <a:lvl6pPr marL="2743200" marR="0" lvl="5" indent="-317500" algn="l" rtl="0">
+              <a:lnSpc>
+                <a:spcPct val="150000"/>
+              </a:lnSpc>
+              <a:spcBef>
+                <a:spcPts val="1600"/>
+              </a:spcBef>
+              <a:spcAft>
+                <a:spcPts val="0"/>
+              </a:spcAft>
+              <a:buClr>
+                <a:srgbClr val="434343"/>
+              </a:buClr>
+              <a:buSzPts val="1400"/>
+              <a:buFont typeface="Roboto"/>
+              <a:buChar char="■"/>
+              <a:defRPr sz="1400" b="0" i="0" u="none" strike="noStrike" cap="none">
+                <a:solidFill>
+                  <a:srgbClr val="434343"/>
+                </a:solidFill>
+                <a:latin typeface="Roboto"/>
+                <a:ea typeface="Roboto"/>
+                <a:cs typeface="Roboto"/>
+                <a:sym typeface="Roboto"/>
+              </a:defRPr>
+            </a:lvl6pPr>
+            <a:lvl7pPr marL="3200400" marR="0" lvl="6" indent="-317500" algn="l" rtl="0">
+              <a:lnSpc>
+                <a:spcPct val="150000"/>
+              </a:lnSpc>
+              <a:spcBef>
+                <a:spcPts val="1600"/>
+              </a:spcBef>
+              <a:spcAft>
+                <a:spcPts val="0"/>
+              </a:spcAft>
+              <a:buClr>
+                <a:srgbClr val="434343"/>
+              </a:buClr>
+              <a:buSzPts val="1400"/>
+              <a:buFont typeface="Roboto"/>
+              <a:buChar char="●"/>
+              <a:defRPr sz="1400" b="0" i="0" u="none" strike="noStrike" cap="none">
+                <a:solidFill>
+                  <a:srgbClr val="434343"/>
+                </a:solidFill>
+                <a:latin typeface="Roboto"/>
+                <a:ea typeface="Roboto"/>
+                <a:cs typeface="Roboto"/>
+                <a:sym typeface="Roboto"/>
+              </a:defRPr>
+            </a:lvl7pPr>
+            <a:lvl8pPr marL="3657600" marR="0" lvl="7" indent="-317500" algn="l" rtl="0">
+              <a:lnSpc>
+                <a:spcPct val="150000"/>
+              </a:lnSpc>
+              <a:spcBef>
+                <a:spcPts val="1600"/>
+              </a:spcBef>
+              <a:spcAft>
+                <a:spcPts val="0"/>
+              </a:spcAft>
+              <a:buClr>
+                <a:srgbClr val="434343"/>
+              </a:buClr>
+              <a:buSzPts val="1400"/>
+              <a:buFont typeface="Roboto"/>
+              <a:buChar char="○"/>
+              <a:defRPr sz="1400" b="0" i="0" u="none" strike="noStrike" cap="none">
+                <a:solidFill>
+                  <a:srgbClr val="434343"/>
+                </a:solidFill>
+                <a:latin typeface="Roboto"/>
+                <a:ea typeface="Roboto"/>
+                <a:cs typeface="Roboto"/>
+                <a:sym typeface="Roboto"/>
+              </a:defRPr>
+            </a:lvl8pPr>
+            <a:lvl9pPr marL="4114800" marR="0" lvl="8" indent="-317500" algn="l" rtl="0">
+              <a:lnSpc>
+                <a:spcPct val="150000"/>
+              </a:lnSpc>
+              <a:spcBef>
+                <a:spcPts val="1600"/>
+              </a:spcBef>
+              <a:spcAft>
+                <a:spcPts val="1600"/>
+              </a:spcAft>
+              <a:buClr>
+                <a:srgbClr val="434343"/>
+              </a:buClr>
+              <a:buSzPts val="1400"/>
+              <a:buFont typeface="Roboto"/>
+              <a:buChar char="■"/>
+              <a:defRPr sz="1400" b="0" i="0" u="none" strike="noStrike" cap="none">
+                <a:solidFill>
+                  <a:srgbClr val="434343"/>
+                </a:solidFill>
+                <a:latin typeface="Roboto"/>
+                <a:ea typeface="Roboto"/>
+                <a:cs typeface="Roboto"/>
+                <a:sym typeface="Roboto"/>
+              </a:defRPr>
+            </a:lvl9pPr>
+          </a:lstStyle>
+          <a:p>
+            <a:pPr marL="114300" indent="0">
+              <a:buFont typeface="Roboto"/>
+              <a:buNone/>
+            </a:pPr>
+            <a:r>
+              <a:rPr lang="pt-BR" sz="1000" b="1" err="1"/>
+              <a:t>Funcao</a:t>
+            </a:r>
+            <a:r>
+              <a:rPr lang="pt-BR" sz="1000"/>
+              <a:t> :=</a:t>
+            </a:r>
+          </a:p>
+          <a:p>
+            <a:pPr marL="114300" indent="0">
+              <a:buNone/>
+            </a:pPr>
+            <a:r>
+              <a:rPr lang="pt-BR" sz="1000"/>
+              <a:t>  &lt;FUNCAO&gt; &lt;IDENTIFIER&gt; "(" (</a:t>
+            </a:r>
+            <a:r>
+              <a:rPr lang="pt-BR" sz="1000" err="1"/>
+              <a:t>Parametros</a:t>
+            </a:r>
+            <a:r>
+              <a:rPr lang="pt-BR" sz="1000"/>
+              <a:t>())? ")" ( ":" </a:t>
+            </a:r>
+            <a:r>
+              <a:rPr lang="pt-BR" sz="1000" err="1"/>
+              <a:t>TipoRetorno</a:t>
+            </a:r>
+            <a:r>
+              <a:rPr lang="pt-BR" sz="1000"/>
+              <a:t>() )? "{" (</a:t>
+            </a:r>
+          </a:p>
+          <a:p>
+            <a:pPr marL="114300" indent="0">
+              <a:buNone/>
+            </a:pPr>
+            <a:r>
+              <a:rPr lang="pt-BR" sz="1000"/>
+              <a:t>    Comando()</a:t>
+            </a:r>
+          </a:p>
+          <a:p>
+            <a:pPr marL="114300" indent="0">
+              <a:buNone/>
+            </a:pPr>
+            <a:r>
+              <a:rPr lang="pt-BR" sz="1000"/>
+              <a:t>  | </a:t>
+            </a:r>
+            <a:r>
+              <a:rPr lang="pt-BR" sz="1000" err="1"/>
+              <a:t>SingleLineComment</a:t>
+            </a:r>
+            <a:r>
+              <a:rPr lang="pt-BR" sz="1000"/>
+              <a:t>()</a:t>
+            </a:r>
+          </a:p>
+          <a:p>
+            <a:pPr marL="114300" indent="0">
+              <a:buNone/>
+            </a:pPr>
+            <a:r>
+              <a:rPr lang="pt-BR" sz="1000"/>
+              <a:t>  | </a:t>
+            </a:r>
+            <a:r>
+              <a:rPr lang="pt-BR" sz="1000" err="1"/>
+              <a:t>MultiLineComment</a:t>
+            </a:r>
+            <a:r>
+              <a:rPr lang="pt-BR" sz="1000"/>
+              <a:t>()</a:t>
+            </a:r>
+          </a:p>
+          <a:p>
+            <a:pPr marL="114300" indent="0">
+              <a:buNone/>
+            </a:pPr>
+            <a:r>
+              <a:rPr lang="pt-BR" sz="1000"/>
+              <a:t>  | </a:t>
+            </a:r>
+            <a:r>
+              <a:rPr lang="pt-BR" sz="1000" err="1"/>
+              <a:t>FormalComment</a:t>
+            </a:r>
+            <a:r>
+              <a:rPr lang="pt-BR" sz="1000"/>
+              <a:t>()</a:t>
+            </a:r>
+          </a:p>
+          <a:p>
+            <a:pPr marL="114300" indent="0">
+              <a:buNone/>
+            </a:pPr>
+            <a:r>
+              <a:rPr lang="pt-BR" sz="1000"/>
+              <a:t>  | Retorne()</a:t>
+            </a:r>
+          </a:p>
+          <a:p>
+            <a:pPr marL="114300" indent="0">
+              <a:buNone/>
+            </a:pPr>
+            <a:r>
+              <a:rPr lang="pt-BR" sz="1000"/>
+              <a:t>  )* "}"</a:t>
+            </a:r>
+          </a:p>
+          <a:p>
+            <a:pPr marL="114300" indent="0">
+              <a:buFont typeface="Roboto"/>
+              <a:buNone/>
+            </a:pPr>
+            <a:endParaRPr lang="pt-BR" sz="1000"/>
+          </a:p>
+        </p:txBody>
+      </p:sp>
+      <p:sp>
+        <p:nvSpPr>
+          <p:cNvPr id="10" name="Espaço Reservado para Texto 2">
+            <a:extLst>
+              <a:ext uri="{FF2B5EF4-FFF2-40B4-BE49-F238E27FC236}">
+                <a16:creationId xmlns:a16="http://schemas.microsoft.com/office/drawing/2014/main" id="{E16DFFED-2902-CFBB-6690-03240586A866}"/>
+              </a:ext>
+            </a:extLst>
+          </p:cNvPr>
+          <p:cNvSpPr txBox="1">
+            <a:spLocks/>
+          </p:cNvSpPr>
+          <p:nvPr/>
+        </p:nvSpPr>
+        <p:spPr>
+          <a:xfrm>
+            <a:off x="4170361" y="1154665"/>
+            <a:ext cx="2267914" cy="3416400"/>
+          </a:xfrm>
+          <a:prstGeom prst="rect">
+            <a:avLst/>
+          </a:prstGeom>
+          <a:noFill/>
+          <a:ln>
+            <a:noFill/>
+          </a:ln>
+        </p:spPr>
+        <p:txBody>
+          <a:bodyPr spcFirstLastPara="1" wrap="square" lIns="91425" tIns="91425" rIns="91425" bIns="91425" anchor="t" anchorCtr="0">
+            <a:noAutofit/>
+          </a:bodyPr>
+          <a:lstStyle>
+            <a:defPPr marR="0" lvl="0" algn="l" rtl="0">
+              <a:lnSpc>
+                <a:spcPct val="100000"/>
+              </a:lnSpc>
+              <a:spcBef>
+                <a:spcPts val="0"/>
+              </a:spcBef>
+              <a:spcAft>
+                <a:spcPts val="0"/>
+              </a:spcAft>
+            </a:defPPr>
+            <a:lvl1pPr marL="457200" marR="0" lvl="0" indent="-342900" algn="l" rtl="0">
+              <a:lnSpc>
+                <a:spcPct val="150000"/>
+              </a:lnSpc>
+              <a:spcBef>
+                <a:spcPts val="0"/>
+              </a:spcBef>
+              <a:spcAft>
+                <a:spcPts val="0"/>
+              </a:spcAft>
+              <a:buClr>
+                <a:srgbClr val="434343"/>
+              </a:buClr>
+              <a:buSzPts val="1800"/>
+              <a:buFont typeface="Roboto"/>
+              <a:buChar char="●"/>
+              <a:defRPr sz="1800" b="0" i="0" u="none" strike="noStrike" cap="none">
+                <a:solidFill>
+                  <a:srgbClr val="434343"/>
+                </a:solidFill>
+                <a:latin typeface="Roboto"/>
+                <a:ea typeface="Roboto"/>
+                <a:cs typeface="Roboto"/>
+                <a:sym typeface="Roboto"/>
+              </a:defRPr>
+            </a:lvl1pPr>
+            <a:lvl2pPr marL="914400" marR="0" lvl="1" indent="-317500" algn="l" rtl="0">
+              <a:lnSpc>
+                <a:spcPct val="150000"/>
+              </a:lnSpc>
+              <a:spcBef>
+                <a:spcPts val="1600"/>
+              </a:spcBef>
+              <a:spcAft>
+                <a:spcPts val="0"/>
+              </a:spcAft>
+              <a:buClr>
+                <a:srgbClr val="434343"/>
+              </a:buClr>
+              <a:buSzPts val="1400"/>
+              <a:buFont typeface="Roboto"/>
+              <a:buChar char="○"/>
+              <a:defRPr sz="1400" b="0" i="0" u="none" strike="noStrike" cap="none">
+                <a:solidFill>
+                  <a:srgbClr val="434343"/>
+                </a:solidFill>
+                <a:latin typeface="Roboto"/>
+                <a:ea typeface="Roboto"/>
+                <a:cs typeface="Roboto"/>
+                <a:sym typeface="Roboto"/>
+              </a:defRPr>
+            </a:lvl2pPr>
+            <a:lvl3pPr marL="1371600" marR="0" lvl="2" indent="-317500" algn="l" rtl="0">
+              <a:lnSpc>
+                <a:spcPct val="150000"/>
+              </a:lnSpc>
+              <a:spcBef>
+                <a:spcPts val="1600"/>
+              </a:spcBef>
+              <a:spcAft>
+                <a:spcPts val="0"/>
+              </a:spcAft>
+              <a:buClr>
+                <a:srgbClr val="434343"/>
+              </a:buClr>
+              <a:buSzPts val="1400"/>
+              <a:buFont typeface="Roboto"/>
+              <a:buChar char="■"/>
+              <a:defRPr sz="1400" b="0" i="0" u="none" strike="noStrike" cap="none">
+                <a:solidFill>
+                  <a:srgbClr val="434343"/>
+                </a:solidFill>
+                <a:latin typeface="Roboto"/>
+                <a:ea typeface="Roboto"/>
+                <a:cs typeface="Roboto"/>
+                <a:sym typeface="Roboto"/>
+              </a:defRPr>
+            </a:lvl3pPr>
+            <a:lvl4pPr marL="1828800" marR="0" lvl="3" indent="-317500" algn="l" rtl="0">
+              <a:lnSpc>
+                <a:spcPct val="150000"/>
+              </a:lnSpc>
+              <a:spcBef>
+                <a:spcPts val="1600"/>
+              </a:spcBef>
+              <a:spcAft>
+                <a:spcPts val="0"/>
+              </a:spcAft>
+              <a:buClr>
+                <a:srgbClr val="434343"/>
+              </a:buClr>
+              <a:buSzPts val="1400"/>
+              <a:buFont typeface="Roboto"/>
+              <a:buChar char="●"/>
+              <a:defRPr sz="1400" b="0" i="0" u="none" strike="noStrike" cap="none">
+                <a:solidFill>
+                  <a:srgbClr val="434343"/>
+                </a:solidFill>
+                <a:latin typeface="Roboto"/>
+                <a:ea typeface="Roboto"/>
+                <a:cs typeface="Roboto"/>
+                <a:sym typeface="Roboto"/>
+              </a:defRPr>
+            </a:lvl4pPr>
+            <a:lvl5pPr marL="2286000" marR="0" lvl="4" indent="-317500" algn="l" rtl="0">
+              <a:lnSpc>
+                <a:spcPct val="150000"/>
+              </a:lnSpc>
+              <a:spcBef>
+                <a:spcPts val="1600"/>
+              </a:spcBef>
+              <a:spcAft>
+                <a:spcPts val="0"/>
+              </a:spcAft>
+              <a:buClr>
+                <a:srgbClr val="434343"/>
+              </a:buClr>
+              <a:buSzPts val="1400"/>
+              <a:buFont typeface="Roboto"/>
+              <a:buChar char="○"/>
+              <a:defRPr sz="1400" b="0" i="0" u="none" strike="noStrike" cap="none">
+                <a:solidFill>
+                  <a:srgbClr val="434343"/>
+                </a:solidFill>
+                <a:latin typeface="Roboto"/>
+                <a:ea typeface="Roboto"/>
+                <a:cs typeface="Roboto"/>
+                <a:sym typeface="Roboto"/>
+              </a:defRPr>
+            </a:lvl5pPr>
+            <a:lvl6pPr marL="2743200" marR="0" lvl="5" indent="-317500" algn="l" rtl="0">
+              <a:lnSpc>
+                <a:spcPct val="150000"/>
+              </a:lnSpc>
+              <a:spcBef>
+                <a:spcPts val="1600"/>
+              </a:spcBef>
+              <a:spcAft>
+                <a:spcPts val="0"/>
+              </a:spcAft>
+              <a:buClr>
+                <a:srgbClr val="434343"/>
+              </a:buClr>
+              <a:buSzPts val="1400"/>
+              <a:buFont typeface="Roboto"/>
+              <a:buChar char="■"/>
+              <a:defRPr sz="1400" b="0" i="0" u="none" strike="noStrike" cap="none">
+                <a:solidFill>
+                  <a:srgbClr val="434343"/>
+                </a:solidFill>
+                <a:latin typeface="Roboto"/>
+                <a:ea typeface="Roboto"/>
+                <a:cs typeface="Roboto"/>
+                <a:sym typeface="Roboto"/>
+              </a:defRPr>
+            </a:lvl6pPr>
+            <a:lvl7pPr marL="3200400" marR="0" lvl="6" indent="-317500" algn="l" rtl="0">
+              <a:lnSpc>
+                <a:spcPct val="150000"/>
+              </a:lnSpc>
+              <a:spcBef>
+                <a:spcPts val="1600"/>
+              </a:spcBef>
+              <a:spcAft>
+                <a:spcPts val="0"/>
+              </a:spcAft>
+              <a:buClr>
+                <a:srgbClr val="434343"/>
+              </a:buClr>
+              <a:buSzPts val="1400"/>
+              <a:buFont typeface="Roboto"/>
+              <a:buChar char="●"/>
+              <a:defRPr sz="1400" b="0" i="0" u="none" strike="noStrike" cap="none">
+                <a:solidFill>
+                  <a:srgbClr val="434343"/>
+                </a:solidFill>
+                <a:latin typeface="Roboto"/>
+                <a:ea typeface="Roboto"/>
+                <a:cs typeface="Roboto"/>
+                <a:sym typeface="Roboto"/>
+              </a:defRPr>
+            </a:lvl7pPr>
+            <a:lvl8pPr marL="3657600" marR="0" lvl="7" indent="-317500" algn="l" rtl="0">
+              <a:lnSpc>
+                <a:spcPct val="150000"/>
+              </a:lnSpc>
+              <a:spcBef>
+                <a:spcPts val="1600"/>
+              </a:spcBef>
+              <a:spcAft>
+                <a:spcPts val="0"/>
+              </a:spcAft>
+              <a:buClr>
+                <a:srgbClr val="434343"/>
+              </a:buClr>
+              <a:buSzPts val="1400"/>
+              <a:buFont typeface="Roboto"/>
+              <a:buChar char="○"/>
+              <a:defRPr sz="1400" b="0" i="0" u="none" strike="noStrike" cap="none">
+                <a:solidFill>
+                  <a:srgbClr val="434343"/>
+                </a:solidFill>
+                <a:latin typeface="Roboto"/>
+                <a:ea typeface="Roboto"/>
+                <a:cs typeface="Roboto"/>
+                <a:sym typeface="Roboto"/>
+              </a:defRPr>
+            </a:lvl8pPr>
+            <a:lvl9pPr marL="4114800" marR="0" lvl="8" indent="-317500" algn="l" rtl="0">
+              <a:lnSpc>
+                <a:spcPct val="150000"/>
+              </a:lnSpc>
+              <a:spcBef>
+                <a:spcPts val="1600"/>
+              </a:spcBef>
+              <a:spcAft>
+                <a:spcPts val="1600"/>
+              </a:spcAft>
+              <a:buClr>
+                <a:srgbClr val="434343"/>
+              </a:buClr>
+              <a:buSzPts val="1400"/>
+              <a:buFont typeface="Roboto"/>
+              <a:buChar char="■"/>
+              <a:defRPr sz="1400" b="0" i="0" u="none" strike="noStrike" cap="none">
+                <a:solidFill>
+                  <a:srgbClr val="434343"/>
+                </a:solidFill>
+                <a:latin typeface="Roboto"/>
+                <a:ea typeface="Roboto"/>
+                <a:cs typeface="Roboto"/>
+                <a:sym typeface="Roboto"/>
+              </a:defRPr>
+            </a:lvl9pPr>
+          </a:lstStyle>
+          <a:p>
+            <a:pPr marL="114300" indent="0">
+              <a:buNone/>
+            </a:pPr>
+            <a:r>
+              <a:rPr lang="pt-BR" sz="900" b="1" err="1"/>
+              <a:t>Config</a:t>
+            </a:r>
+            <a:r>
+              <a:rPr lang="pt-BR" sz="900"/>
+              <a:t> :=</a:t>
+            </a:r>
+          </a:p>
+          <a:p>
+            <a:pPr marL="114300" indent="0">
+              <a:buNone/>
+            </a:pPr>
+            <a:r>
+              <a:rPr lang="pt-BR" sz="900"/>
+              <a:t>&lt;CONFIG&gt; "{" (</a:t>
+            </a:r>
+          </a:p>
+          <a:p>
+            <a:pPr marL="114300" indent="0">
+              <a:buNone/>
+            </a:pPr>
+            <a:r>
+              <a:rPr lang="pt-BR" sz="900"/>
+              <a:t>    </a:t>
+            </a:r>
+            <a:r>
+              <a:rPr lang="pt-BR" sz="900" err="1"/>
+              <a:t>PinMode</a:t>
+            </a:r>
+            <a:r>
+              <a:rPr lang="pt-BR" sz="900"/>
+              <a:t>()</a:t>
+            </a:r>
+          </a:p>
+          <a:p>
+            <a:pPr marL="114300" indent="0">
+              <a:buNone/>
+            </a:pPr>
+            <a:r>
+              <a:rPr lang="pt-BR" sz="900"/>
+              <a:t>  | </a:t>
+            </a:r>
+            <a:r>
+              <a:rPr lang="pt-BR" sz="900" err="1"/>
+              <a:t>FreqMonitor</a:t>
+            </a:r>
+            <a:r>
+              <a:rPr lang="pt-BR" sz="900"/>
+              <a:t>()</a:t>
+            </a:r>
+          </a:p>
+          <a:p>
+            <a:pPr marL="114300" indent="0">
+              <a:buNone/>
+            </a:pPr>
+            <a:r>
+              <a:rPr lang="pt-BR" sz="900"/>
+              <a:t>  | </a:t>
+            </a:r>
+            <a:r>
+              <a:rPr lang="pt-BR" sz="900" err="1"/>
+              <a:t>DecVar</a:t>
+            </a:r>
+            <a:r>
+              <a:rPr lang="pt-BR" sz="900"/>
+              <a:t>()</a:t>
+            </a:r>
+          </a:p>
+          <a:p>
+            <a:pPr marL="114300" indent="0">
+              <a:buNone/>
+            </a:pPr>
+            <a:r>
+              <a:rPr lang="pt-BR" sz="900"/>
+              <a:t>  | </a:t>
+            </a:r>
+            <a:r>
+              <a:rPr lang="pt-BR" sz="900" err="1"/>
+              <a:t>SingleLineComment</a:t>
+            </a:r>
+            <a:r>
+              <a:rPr lang="pt-BR" sz="900"/>
+              <a:t>()</a:t>
+            </a:r>
+          </a:p>
+          <a:p>
+            <a:pPr marL="114300" indent="0">
+              <a:buNone/>
+            </a:pPr>
+            <a:r>
+              <a:rPr lang="pt-BR" sz="900"/>
+              <a:t>  | </a:t>
+            </a:r>
+            <a:r>
+              <a:rPr lang="pt-BR" sz="900" err="1"/>
+              <a:t>MultiLineComment</a:t>
+            </a:r>
+            <a:r>
+              <a:rPr lang="pt-BR" sz="900"/>
+              <a:t>()</a:t>
+            </a:r>
+          </a:p>
+          <a:p>
+            <a:pPr marL="114300" indent="0">
+              <a:buNone/>
+            </a:pPr>
+            <a:r>
+              <a:rPr lang="pt-BR" sz="900"/>
+              <a:t>  | </a:t>
+            </a:r>
+            <a:r>
+              <a:rPr lang="pt-BR" sz="900" err="1"/>
+              <a:t>FormalComment</a:t>
+            </a:r>
+            <a:r>
+              <a:rPr lang="pt-BR" sz="900"/>
+              <a:t>()</a:t>
+            </a:r>
+          </a:p>
+          <a:p>
+            <a:pPr marL="114300" indent="0">
+              <a:buNone/>
+            </a:pPr>
+            <a:r>
+              <a:rPr lang="pt-BR" sz="900"/>
+              <a:t>  )* "}“</a:t>
+            </a:r>
+          </a:p>
+          <a:p>
+            <a:pPr marL="114300" indent="0">
+              <a:buNone/>
+            </a:pPr>
+            <a:endParaRPr lang="pt-BR" sz="900"/>
+          </a:p>
+          <a:p>
+            <a:pPr marL="114300" indent="0">
+              <a:buNone/>
+            </a:pPr>
+            <a:r>
+              <a:rPr lang="pt-BR" sz="900" b="1"/>
+              <a:t>Execute</a:t>
+            </a:r>
+            <a:r>
+              <a:rPr lang="pt-BR" sz="900"/>
+              <a:t> :=</a:t>
+            </a:r>
+          </a:p>
+          <a:p>
+            <a:pPr marL="114300" indent="0">
+              <a:buNone/>
+            </a:pPr>
+            <a:r>
+              <a:rPr lang="pt-BR" sz="900"/>
+              <a:t>&lt;EXECUTE&gt; "{" (</a:t>
+            </a:r>
+          </a:p>
+          <a:p>
+            <a:pPr marL="114300" indent="0">
+              <a:buNone/>
+            </a:pPr>
+            <a:r>
+              <a:rPr lang="pt-BR" sz="900"/>
+              <a:t>    Comando()</a:t>
+            </a:r>
+          </a:p>
+          <a:p>
+            <a:pPr marL="114300" indent="0">
+              <a:buNone/>
+            </a:pPr>
+            <a:r>
+              <a:rPr lang="pt-BR" sz="900"/>
+              <a:t>  | </a:t>
+            </a:r>
+            <a:r>
+              <a:rPr lang="pt-BR" sz="900" err="1"/>
+              <a:t>SingleLineComment</a:t>
+            </a:r>
+            <a:r>
+              <a:rPr lang="pt-BR" sz="900"/>
+              <a:t>()</a:t>
+            </a:r>
+          </a:p>
+          <a:p>
+            <a:pPr marL="114300" indent="0">
+              <a:buNone/>
+            </a:pPr>
+            <a:r>
+              <a:rPr lang="pt-BR" sz="900"/>
+              <a:t>  | </a:t>
+            </a:r>
+            <a:r>
+              <a:rPr lang="pt-BR" sz="900" err="1"/>
+              <a:t>MultiLineComment</a:t>
+            </a:r>
+            <a:r>
+              <a:rPr lang="pt-BR" sz="900"/>
+              <a:t>()</a:t>
+            </a:r>
+          </a:p>
+          <a:p>
+            <a:pPr marL="114300" indent="0">
+              <a:buNone/>
+            </a:pPr>
+            <a:r>
+              <a:rPr lang="pt-BR" sz="900"/>
+              <a:t>  | </a:t>
+            </a:r>
+            <a:r>
+              <a:rPr lang="pt-BR" sz="900" err="1"/>
+              <a:t>FormalComment</a:t>
+            </a:r>
+            <a:r>
+              <a:rPr lang="pt-BR" sz="900"/>
+              <a:t>()</a:t>
+            </a:r>
+          </a:p>
+          <a:p>
+            <a:pPr marL="114300" indent="0">
+              <a:buNone/>
+            </a:pPr>
+            <a:r>
+              <a:rPr lang="pt-BR" sz="900"/>
+              <a:t>  )* "}“</a:t>
+            </a:r>
+          </a:p>
+          <a:p>
+            <a:pPr marL="114300" indent="0">
+              <a:buNone/>
+            </a:pPr>
+            <a:endParaRPr lang="pt-BR" sz="900"/>
+          </a:p>
+        </p:txBody>
+      </p:sp>
+      <p:sp>
+        <p:nvSpPr>
+          <p:cNvPr id="11" name="Espaço Reservado para Texto 2">
+            <a:extLst>
+              <a:ext uri="{FF2B5EF4-FFF2-40B4-BE49-F238E27FC236}">
+                <a16:creationId xmlns:a16="http://schemas.microsoft.com/office/drawing/2014/main" id="{20249EDB-49CF-6928-98F7-067E1E6E3603}"/>
+              </a:ext>
+            </a:extLst>
+          </p:cNvPr>
+          <p:cNvSpPr txBox="1">
+            <a:spLocks/>
+          </p:cNvSpPr>
+          <p:nvPr/>
+        </p:nvSpPr>
+        <p:spPr>
+          <a:xfrm>
+            <a:off x="6438275" y="1128221"/>
+            <a:ext cx="2101718" cy="3416400"/>
+          </a:xfrm>
+          <a:prstGeom prst="rect">
+            <a:avLst/>
+          </a:prstGeom>
+          <a:noFill/>
+          <a:ln>
+            <a:noFill/>
+          </a:ln>
+        </p:spPr>
+        <p:txBody>
+          <a:bodyPr spcFirstLastPara="1" wrap="square" lIns="91425" tIns="91425" rIns="91425" bIns="91425" anchor="t" anchorCtr="0">
+            <a:normAutofit lnSpcReduction="10000"/>
+          </a:bodyPr>
+          <a:lstStyle>
+            <a:defPPr marR="0" lvl="0" algn="l" rtl="0">
+              <a:lnSpc>
+                <a:spcPct val="100000"/>
+              </a:lnSpc>
+              <a:spcBef>
+                <a:spcPts val="0"/>
+              </a:spcBef>
+              <a:spcAft>
+                <a:spcPts val="0"/>
+              </a:spcAft>
+            </a:defPPr>
+            <a:lvl1pPr marL="457200" marR="0" lvl="0" indent="-342900" algn="l" rtl="0">
+              <a:lnSpc>
+                <a:spcPct val="150000"/>
+              </a:lnSpc>
+              <a:spcBef>
+                <a:spcPts val="0"/>
+              </a:spcBef>
+              <a:spcAft>
+                <a:spcPts val="0"/>
+              </a:spcAft>
+              <a:buClr>
+                <a:srgbClr val="434343"/>
+              </a:buClr>
+              <a:buSzPts val="1800"/>
+              <a:buFont typeface="Roboto"/>
+              <a:buChar char="●"/>
+              <a:defRPr sz="1800" b="0" i="0" u="none" strike="noStrike" cap="none">
+                <a:solidFill>
+                  <a:srgbClr val="434343"/>
+                </a:solidFill>
+                <a:latin typeface="Roboto"/>
+                <a:ea typeface="Roboto"/>
+                <a:cs typeface="Roboto"/>
+                <a:sym typeface="Roboto"/>
+              </a:defRPr>
+            </a:lvl1pPr>
+            <a:lvl2pPr marL="914400" marR="0" lvl="1" indent="-317500" algn="l" rtl="0">
+              <a:lnSpc>
+                <a:spcPct val="150000"/>
+              </a:lnSpc>
+              <a:spcBef>
+                <a:spcPts val="1600"/>
+              </a:spcBef>
+              <a:spcAft>
+                <a:spcPts val="0"/>
+              </a:spcAft>
+              <a:buClr>
+                <a:srgbClr val="434343"/>
+              </a:buClr>
+              <a:buSzPts val="1400"/>
+              <a:buFont typeface="Roboto"/>
+              <a:buChar char="○"/>
+              <a:defRPr sz="1400" b="0" i="0" u="none" strike="noStrike" cap="none">
+                <a:solidFill>
+                  <a:srgbClr val="434343"/>
+                </a:solidFill>
+                <a:latin typeface="Roboto"/>
+                <a:ea typeface="Roboto"/>
+                <a:cs typeface="Roboto"/>
+                <a:sym typeface="Roboto"/>
+              </a:defRPr>
+            </a:lvl2pPr>
+            <a:lvl3pPr marL="1371600" marR="0" lvl="2" indent="-317500" algn="l" rtl="0">
+              <a:lnSpc>
+                <a:spcPct val="150000"/>
+              </a:lnSpc>
+              <a:spcBef>
+                <a:spcPts val="1600"/>
+              </a:spcBef>
+              <a:spcAft>
+                <a:spcPts val="0"/>
+              </a:spcAft>
+              <a:buClr>
+                <a:srgbClr val="434343"/>
+              </a:buClr>
+              <a:buSzPts val="1400"/>
+              <a:buFont typeface="Roboto"/>
+              <a:buChar char="■"/>
+              <a:defRPr sz="1400" b="0" i="0" u="none" strike="noStrike" cap="none">
+                <a:solidFill>
+                  <a:srgbClr val="434343"/>
+                </a:solidFill>
+                <a:latin typeface="Roboto"/>
+                <a:ea typeface="Roboto"/>
+                <a:cs typeface="Roboto"/>
+                <a:sym typeface="Roboto"/>
+              </a:defRPr>
+            </a:lvl3pPr>
+            <a:lvl4pPr marL="1828800" marR="0" lvl="3" indent="-317500" algn="l" rtl="0">
+              <a:lnSpc>
+                <a:spcPct val="150000"/>
+              </a:lnSpc>
+              <a:spcBef>
+                <a:spcPts val="1600"/>
+              </a:spcBef>
+              <a:spcAft>
+                <a:spcPts val="0"/>
+              </a:spcAft>
+              <a:buClr>
+                <a:srgbClr val="434343"/>
+              </a:buClr>
+              <a:buSzPts val="1400"/>
+              <a:buFont typeface="Roboto"/>
+              <a:buChar char="●"/>
+              <a:defRPr sz="1400" b="0" i="0" u="none" strike="noStrike" cap="none">
+                <a:solidFill>
+                  <a:srgbClr val="434343"/>
+                </a:solidFill>
+                <a:latin typeface="Roboto"/>
+                <a:ea typeface="Roboto"/>
+                <a:cs typeface="Roboto"/>
+                <a:sym typeface="Roboto"/>
+              </a:defRPr>
+            </a:lvl4pPr>
+            <a:lvl5pPr marL="2286000" marR="0" lvl="4" indent="-317500" algn="l" rtl="0">
+              <a:lnSpc>
+                <a:spcPct val="150000"/>
+              </a:lnSpc>
+              <a:spcBef>
+                <a:spcPts val="1600"/>
+              </a:spcBef>
+              <a:spcAft>
+                <a:spcPts val="0"/>
+              </a:spcAft>
+              <a:buClr>
+                <a:srgbClr val="434343"/>
+              </a:buClr>
+              <a:buSzPts val="1400"/>
+              <a:buFont typeface="Roboto"/>
+              <a:buChar char="○"/>
+              <a:defRPr sz="1400" b="0" i="0" u="none" strike="noStrike" cap="none">
+                <a:solidFill>
+                  <a:srgbClr val="434343"/>
+                </a:solidFill>
+                <a:latin typeface="Roboto"/>
+                <a:ea typeface="Roboto"/>
+                <a:cs typeface="Roboto"/>
+                <a:sym typeface="Roboto"/>
+              </a:defRPr>
+            </a:lvl5pPr>
+            <a:lvl6pPr marL="2743200" marR="0" lvl="5" indent="-317500" algn="l" rtl="0">
+              <a:lnSpc>
+                <a:spcPct val="150000"/>
+              </a:lnSpc>
+              <a:spcBef>
+                <a:spcPts val="1600"/>
+              </a:spcBef>
+              <a:spcAft>
+                <a:spcPts val="0"/>
+              </a:spcAft>
+              <a:buClr>
+                <a:srgbClr val="434343"/>
+              </a:buClr>
+              <a:buSzPts val="1400"/>
+              <a:buFont typeface="Roboto"/>
+              <a:buChar char="■"/>
+              <a:defRPr sz="1400" b="0" i="0" u="none" strike="noStrike" cap="none">
+                <a:solidFill>
+                  <a:srgbClr val="434343"/>
+                </a:solidFill>
+                <a:latin typeface="Roboto"/>
+                <a:ea typeface="Roboto"/>
+                <a:cs typeface="Roboto"/>
+                <a:sym typeface="Roboto"/>
+              </a:defRPr>
+            </a:lvl6pPr>
+            <a:lvl7pPr marL="3200400" marR="0" lvl="6" indent="-317500" algn="l" rtl="0">
+              <a:lnSpc>
+                <a:spcPct val="150000"/>
+              </a:lnSpc>
+              <a:spcBef>
+                <a:spcPts val="1600"/>
+              </a:spcBef>
+              <a:spcAft>
+                <a:spcPts val="0"/>
+              </a:spcAft>
+              <a:buClr>
+                <a:srgbClr val="434343"/>
+              </a:buClr>
+              <a:buSzPts val="1400"/>
+              <a:buFont typeface="Roboto"/>
+              <a:buChar char="●"/>
+              <a:defRPr sz="1400" b="0" i="0" u="none" strike="noStrike" cap="none">
+                <a:solidFill>
+                  <a:srgbClr val="434343"/>
+                </a:solidFill>
+                <a:latin typeface="Roboto"/>
+                <a:ea typeface="Roboto"/>
+                <a:cs typeface="Roboto"/>
+                <a:sym typeface="Roboto"/>
+              </a:defRPr>
+            </a:lvl7pPr>
+            <a:lvl8pPr marL="3657600" marR="0" lvl="7" indent="-317500" algn="l" rtl="0">
+              <a:lnSpc>
+                <a:spcPct val="150000"/>
+              </a:lnSpc>
+              <a:spcBef>
+                <a:spcPts val="1600"/>
+              </a:spcBef>
+              <a:spcAft>
+                <a:spcPts val="0"/>
+              </a:spcAft>
+              <a:buClr>
+                <a:srgbClr val="434343"/>
+              </a:buClr>
+              <a:buSzPts val="1400"/>
+              <a:buFont typeface="Roboto"/>
+              <a:buChar char="○"/>
+              <a:defRPr sz="1400" b="0" i="0" u="none" strike="noStrike" cap="none">
+                <a:solidFill>
+                  <a:srgbClr val="434343"/>
+                </a:solidFill>
+                <a:latin typeface="Roboto"/>
+                <a:ea typeface="Roboto"/>
+                <a:cs typeface="Roboto"/>
+                <a:sym typeface="Roboto"/>
+              </a:defRPr>
+            </a:lvl8pPr>
+            <a:lvl9pPr marL="4114800" marR="0" lvl="8" indent="-317500" algn="l" rtl="0">
+              <a:lnSpc>
+                <a:spcPct val="150000"/>
+              </a:lnSpc>
+              <a:spcBef>
+                <a:spcPts val="1600"/>
+              </a:spcBef>
+              <a:spcAft>
+                <a:spcPts val="1600"/>
+              </a:spcAft>
+              <a:buClr>
+                <a:srgbClr val="434343"/>
+              </a:buClr>
+              <a:buSzPts val="1400"/>
+              <a:buFont typeface="Roboto"/>
+              <a:buChar char="■"/>
+              <a:defRPr sz="1400" b="0" i="0" u="none" strike="noStrike" cap="none">
+                <a:solidFill>
+                  <a:srgbClr val="434343"/>
+                </a:solidFill>
+                <a:latin typeface="Roboto"/>
+                <a:ea typeface="Roboto"/>
+                <a:cs typeface="Roboto"/>
+                <a:sym typeface="Roboto"/>
+              </a:defRPr>
+            </a:lvl9pPr>
+          </a:lstStyle>
+          <a:p>
+            <a:pPr marL="114300" indent="0">
+              <a:buNone/>
+            </a:pPr>
+            <a:r>
+              <a:rPr lang="pt-BR" sz="900" b="1"/>
+              <a:t>Comando</a:t>
+            </a:r>
+            <a:r>
+              <a:rPr lang="pt-BR" sz="900"/>
+              <a:t> :=</a:t>
+            </a:r>
+          </a:p>
+          <a:p>
+            <a:pPr marL="114300" indent="0">
+              <a:buNone/>
+            </a:pPr>
+            <a:r>
+              <a:rPr lang="pt-BR" sz="900"/>
+              <a:t>( </a:t>
+            </a:r>
+          </a:p>
+          <a:p>
+            <a:pPr marL="114300" indent="0">
+              <a:buNone/>
+            </a:pPr>
+            <a:r>
+              <a:rPr lang="pt-BR" sz="900"/>
+              <a:t>    </a:t>
+            </a:r>
+            <a:r>
+              <a:rPr lang="pt-BR" sz="900" err="1"/>
+              <a:t>PinMode</a:t>
+            </a:r>
+            <a:r>
+              <a:rPr lang="pt-BR" sz="900"/>
+              <a:t>() </a:t>
+            </a:r>
+          </a:p>
+          <a:p>
+            <a:pPr marL="114300" indent="0">
+              <a:buNone/>
+            </a:pPr>
+            <a:r>
+              <a:rPr lang="pt-BR" sz="900"/>
+              <a:t>  | Delay() </a:t>
+            </a:r>
+          </a:p>
+          <a:p>
+            <a:pPr marL="114300" indent="0">
+              <a:buNone/>
+            </a:pPr>
+            <a:r>
+              <a:rPr lang="pt-BR" sz="900"/>
+              <a:t>  | </a:t>
+            </a:r>
+            <a:r>
+              <a:rPr lang="pt-BR" sz="900" err="1"/>
+              <a:t>Read</a:t>
+            </a:r>
+            <a:r>
+              <a:rPr lang="pt-BR" sz="900"/>
+              <a:t>() </a:t>
+            </a:r>
+          </a:p>
+          <a:p>
+            <a:pPr marL="114300" indent="0">
+              <a:buNone/>
+            </a:pPr>
+            <a:r>
+              <a:rPr lang="pt-BR" sz="900"/>
+              <a:t>  | </a:t>
+            </a:r>
+            <a:r>
+              <a:rPr lang="pt-BR" sz="900" err="1"/>
+              <a:t>DigitalWrite</a:t>
+            </a:r>
+            <a:r>
+              <a:rPr lang="pt-BR" sz="900"/>
+              <a:t>() </a:t>
+            </a:r>
+          </a:p>
+          <a:p>
+            <a:pPr marL="114300" indent="0">
+              <a:buNone/>
+            </a:pPr>
+            <a:r>
+              <a:rPr lang="pt-BR" sz="900"/>
+              <a:t>  | </a:t>
+            </a:r>
+            <a:r>
+              <a:rPr lang="pt-BR" sz="900" err="1"/>
+              <a:t>AnalogWrite</a:t>
+            </a:r>
+            <a:r>
+              <a:rPr lang="pt-BR" sz="900"/>
+              <a:t>() </a:t>
+            </a:r>
+          </a:p>
+          <a:p>
+            <a:pPr marL="114300" indent="0">
+              <a:buNone/>
+            </a:pPr>
+            <a:r>
+              <a:rPr lang="pt-BR" sz="900"/>
+              <a:t>  | </a:t>
+            </a:r>
+            <a:r>
+              <a:rPr lang="pt-BR" sz="900" err="1"/>
+              <a:t>SerialPrint</a:t>
+            </a:r>
+            <a:r>
+              <a:rPr lang="pt-BR" sz="900"/>
+              <a:t>() </a:t>
+            </a:r>
+          </a:p>
+          <a:p>
+            <a:pPr marL="114300" indent="0">
+              <a:buNone/>
+            </a:pPr>
+            <a:r>
+              <a:rPr lang="pt-BR" sz="900"/>
+              <a:t>  | </a:t>
+            </a:r>
+            <a:r>
+              <a:rPr lang="pt-BR" sz="900" err="1"/>
+              <a:t>DecVar</a:t>
+            </a:r>
+            <a:r>
+              <a:rPr lang="pt-BR" sz="900"/>
+              <a:t>() </a:t>
+            </a:r>
+          </a:p>
+          <a:p>
+            <a:pPr marL="114300" indent="0">
+              <a:buNone/>
+            </a:pPr>
+            <a:r>
+              <a:rPr lang="pt-BR" sz="900"/>
+              <a:t>  | </a:t>
+            </a:r>
+            <a:r>
+              <a:rPr lang="pt-BR" sz="900" err="1"/>
+              <a:t>SeSenao</a:t>
+            </a:r>
+            <a:r>
+              <a:rPr lang="pt-BR" sz="900"/>
+              <a:t>() </a:t>
+            </a:r>
+          </a:p>
+          <a:p>
+            <a:pPr marL="114300" indent="0">
+              <a:buNone/>
+            </a:pPr>
+            <a:r>
+              <a:rPr lang="pt-BR" sz="900"/>
+              <a:t>  | Repita() </a:t>
+            </a:r>
+          </a:p>
+          <a:p>
+            <a:pPr marL="114300" indent="0">
+              <a:buNone/>
+            </a:pPr>
+            <a:r>
+              <a:rPr lang="pt-BR" sz="900"/>
+              <a:t>  | LOOKAHEAD( &lt;IDENTIFIER&gt; "=" ) </a:t>
+            </a:r>
+            <a:r>
+              <a:rPr lang="pt-BR" sz="900" err="1"/>
+              <a:t>Atribuicao</a:t>
+            </a:r>
+            <a:r>
+              <a:rPr lang="pt-BR" sz="900"/>
+              <a:t>()</a:t>
+            </a:r>
+          </a:p>
+          <a:p>
+            <a:pPr marL="114300" indent="0">
+              <a:buNone/>
+            </a:pPr>
+            <a:r>
+              <a:rPr lang="pt-BR" sz="900"/>
+              <a:t>  | LOOKAHEAD( &lt;IDENTIFIER&gt; "(" ) </a:t>
+            </a:r>
+            <a:r>
+              <a:rPr lang="pt-BR" sz="900" err="1"/>
+              <a:t>ChamadaFuncao</a:t>
+            </a:r>
+            <a:r>
+              <a:rPr lang="pt-BR" sz="900"/>
+              <a:t>()</a:t>
+            </a:r>
+          </a:p>
+          <a:p>
+            <a:pPr marL="114300" indent="0">
+              <a:buNone/>
+            </a:pPr>
+            <a:r>
+              <a:rPr lang="pt-BR" sz="900"/>
+              <a:t>  )</a:t>
+            </a:r>
+          </a:p>
+        </p:txBody>
+      </p:sp>
+    </p:spTree>
+    <p:extLst>
+      <p:ext uri="{BB962C8B-B14F-4D97-AF65-F5344CB8AC3E}">
+        <p14:creationId xmlns:p14="http://schemas.microsoft.com/office/powerpoint/2010/main" val="1938927544"/>
+      </p:ext>
+    </p:extLst>
+  </p:cSld>
+  <p:clrMapOvr>
+    <a:masterClrMapping/>
+  </p:clrMapOvr>
+</p:sld>
+</file>
+
+<file path=ppt/slides/slide8.xml><?xml version="1.0" encoding="utf-8"?>
 <p:sld xmlns:a="http://schemas.openxmlformats.org/drawingml/2006/main" xmlns:r="http://schemas.openxmlformats.org/officeDocument/2006/relationships" xmlns:p="http://schemas.openxmlformats.org/presentationml/2006/main">
   <p:cSld>
     <p:spTree>
@@ -10904,11 +12709,11 @@
           <a:lstStyle/>
           <a:p>
             <a:r>
-              <a:rPr lang="pt-BR" dirty="0" err="1"/>
+              <a:rPr lang="pt-BR" err="1"/>
               <a:t>Visitors</a:t>
             </a:r>
             <a:r>
-              <a:rPr lang="pt-BR" dirty="0"/>
+              <a:rPr lang="pt-BR"/>
               <a:t>: Visitor</a:t>
             </a:r>
           </a:p>
@@ -10987,7 +12792,7 @@
 </p:sld>
 </file>
 
-<file path=ppt/slides/slide8.xml><?xml version="1.0" encoding="utf-8"?>
+<file path=ppt/slides/slide9.xml><?xml version="1.0" encoding="utf-8"?>
 <p:sld xmlns:a="http://schemas.openxmlformats.org/drawingml/2006/main" xmlns:r="http://schemas.openxmlformats.org/officeDocument/2006/relationships" xmlns:p="http://schemas.openxmlformats.org/presentationml/2006/main">
   <p:cSld>
     <p:spTree>
@@ -11032,7 +12837,7 @@
           <a:lstStyle/>
           <a:p>
             <a:r>
-              <a:rPr lang="pt-BR" dirty="0"/>
+              <a:rPr lang="pt-BR"/>
               <a:t>Exemplo 1: Original X Gerado</a:t>
             </a:r>
           </a:p>
@@ -11102,124 +12907,6 @@
     <p:extLst>
       <p:ext uri="{BB962C8B-B14F-4D97-AF65-F5344CB8AC3E}">
         <p14:creationId xmlns:p14="http://schemas.microsoft.com/office/powerpoint/2010/main" val="3660645131"/>
-      </p:ext>
-    </p:extLst>
-  </p:cSld>
-  <p:clrMapOvr>
-    <a:masterClrMapping/>
-  </p:clrMapOvr>
-</p:sld>
-</file>
-
-<file path=ppt/slides/slide9.xml><?xml version="1.0" encoding="utf-8"?>
-<p:sld xmlns:a="http://schemas.openxmlformats.org/drawingml/2006/main" xmlns:r="http://schemas.openxmlformats.org/officeDocument/2006/relationships" xmlns:p="http://schemas.openxmlformats.org/presentationml/2006/main">
-  <p:cSld>
-    <p:spTree>
-      <p:nvGrpSpPr>
-        <p:cNvPr id="1" name=""/>
-        <p:cNvGrpSpPr/>
-        <p:nvPr/>
-      </p:nvGrpSpPr>
-      <p:grpSpPr>
-        <a:xfrm>
-          <a:off x="0" y="0"/>
-          <a:ext cx="0" cy="0"/>
-          <a:chOff x="0" y="0"/>
-          <a:chExt cx="0" cy="0"/>
-        </a:xfrm>
-      </p:grpSpPr>
-      <p:sp>
-        <p:nvSpPr>
-          <p:cNvPr id="2" name="Título 1">
-            <a:extLst>
-              <a:ext uri="{FF2B5EF4-FFF2-40B4-BE49-F238E27FC236}">
-                <a16:creationId xmlns:a16="http://schemas.microsoft.com/office/drawing/2014/main" id="{1E296379-3D96-CAA7-28BD-63FB7B89CDC0}"/>
-              </a:ext>
-            </a:extLst>
-          </p:cNvPr>
-          <p:cNvSpPr>
-            <a:spLocks noGrp="1"/>
-          </p:cNvSpPr>
-          <p:nvPr>
-            <p:ph type="title"/>
-          </p:nvPr>
-        </p:nvSpPr>
-        <p:spPr/>
-        <p:txBody>
-          <a:bodyPr/>
-          <a:lstStyle/>
-          <a:p>
-            <a:r>
-              <a:rPr lang="pt-BR" dirty="0"/>
-              <a:t>Exemplo 2: Original X Gerado</a:t>
-            </a:r>
-          </a:p>
-        </p:txBody>
-      </p:sp>
-      <p:pic>
-        <p:nvPicPr>
-          <p:cNvPr id="5" name="Imagem 4">
-            <a:extLst>
-              <a:ext uri="{FF2B5EF4-FFF2-40B4-BE49-F238E27FC236}">
-                <a16:creationId xmlns:a16="http://schemas.microsoft.com/office/drawing/2014/main" id="{9134CC02-8E3E-6B95-1285-0FCD19B25502}"/>
-              </a:ext>
-            </a:extLst>
-          </p:cNvPr>
-          <p:cNvPicPr>
-            <a:picLocks noChangeAspect="1"/>
-          </p:cNvPicPr>
-          <p:nvPr/>
-        </p:nvPicPr>
-        <p:blipFill>
-          <a:blip r:embed="rId2"/>
-          <a:stretch>
-            <a:fillRect/>
-          </a:stretch>
-        </p:blipFill>
-        <p:spPr>
-          <a:xfrm>
-            <a:off x="1244412" y="1040685"/>
-            <a:ext cx="3036926" cy="3717036"/>
-          </a:xfrm>
-          <a:prstGeom prst="rect">
-            <a:avLst/>
-          </a:prstGeom>
-        </p:spPr>
-      </p:pic>
-      <p:pic>
-        <p:nvPicPr>
-          <p:cNvPr id="7" name="Imagem 6">
-            <a:extLst>
-              <a:ext uri="{FF2B5EF4-FFF2-40B4-BE49-F238E27FC236}">
-                <a16:creationId xmlns:a16="http://schemas.microsoft.com/office/drawing/2014/main" id="{D7ECF204-4648-A4B8-D6B8-4555B3D044EB}"/>
-              </a:ext>
-            </a:extLst>
-          </p:cNvPr>
-          <p:cNvPicPr>
-            <a:picLocks noChangeAspect="1"/>
-          </p:cNvPicPr>
-          <p:nvPr/>
-        </p:nvPicPr>
-        <p:blipFill>
-          <a:blip r:embed="rId3"/>
-          <a:stretch>
-            <a:fillRect/>
-          </a:stretch>
-        </p:blipFill>
-        <p:spPr>
-          <a:xfrm>
-            <a:off x="4862664" y="1040685"/>
-            <a:ext cx="3252123" cy="3705606"/>
-          </a:xfrm>
-          <a:prstGeom prst="rect">
-            <a:avLst/>
-          </a:prstGeom>
-        </p:spPr>
-      </p:pic>
-    </p:spTree>
-    <p:extLst>
-      <p:ext uri="{BB962C8B-B14F-4D97-AF65-F5344CB8AC3E}">
-        <p14:creationId xmlns:p14="http://schemas.microsoft.com/office/powerpoint/2010/main" val="3625576380"/>
       </p:ext>
     </p:extLst>
   </p:cSld>
